--- a/docs/NutriSense_Presentation.pptx
+++ b/docs/NutriSense_Presentation.pptx
@@ -3148,7 +3148,7 @@
         </p:nvSpPr>
         <p:spPr>
           <a:xfrm>
-            <a:off x="731520" y="731520"/>
+            <a:off x="731520" y="594360"/>
             <a:ext cx="10698480" cy="365760"/>
           </a:xfrm>
           <a:prstGeom prst="rect">
@@ -3183,8 +3183,8 @@
         </p:nvSpPr>
         <p:spPr>
           <a:xfrm>
-            <a:off x="731520" y="1097280"/>
-            <a:ext cx="10698480" cy="1097280"/>
+            <a:off x="731520" y="960120"/>
+            <a:ext cx="10698480" cy="1005840"/>
           </a:xfrm>
           <a:prstGeom prst="rect">
             <a:avLst/>
@@ -3198,7 +3198,7 @@
           <a:lstStyle/>
           <a:p>
             <a:pPr>
-              <a:defRPr sz="4800" b="1">
+              <a:defRPr sz="4600" b="1">
                 <a:solidFill>
                   <a:srgbClr val="10B981"/>
                 </a:solidFill>
@@ -3218,8 +3218,8 @@
         </p:nvSpPr>
         <p:spPr>
           <a:xfrm>
-            <a:off x="731520" y="2103120"/>
-            <a:ext cx="10698480" cy="640080"/>
+            <a:off x="731520" y="1965960"/>
+            <a:ext cx="10698480" cy="548640"/>
           </a:xfrm>
           <a:prstGeom prst="rect">
             <a:avLst/>
@@ -3233,7 +3233,7 @@
           <a:lstStyle/>
           <a:p>
             <a:pPr>
-              <a:defRPr sz="1700">
+              <a:defRPr sz="1650">
                 <a:solidFill>
                   <a:srgbClr val="F8FAFC"/>
                 </a:solidFill>
@@ -3253,8 +3253,8 @@
         </p:nvSpPr>
         <p:spPr>
           <a:xfrm>
-            <a:off x="731520" y="2743200"/>
-            <a:ext cx="10698480" cy="548640"/>
+            <a:off x="731520" y="2560320"/>
+            <a:ext cx="10698480" cy="457200"/>
           </a:xfrm>
           <a:prstGeom prst="rect">
             <a:avLst/>
@@ -3268,7 +3268,7 @@
           <a:lstStyle/>
           <a:p>
             <a:pPr>
-              <a:defRPr sz="1400" b="1">
+              <a:defRPr sz="1350" b="1">
                 <a:solidFill>
                   <a:srgbClr val="06B6D4"/>
                 </a:solidFill>
@@ -3288,8 +3288,8 @@
         </p:nvSpPr>
         <p:spPr>
           <a:xfrm>
-            <a:off x="731520" y="3566160"/>
-            <a:ext cx="2514600" cy="2560320"/>
+            <a:off x="731520" y="3291840"/>
+            <a:ext cx="2514600" cy="2926080"/>
           </a:xfrm>
           <a:prstGeom prst="roundRect">
             <a:avLst/>
@@ -3327,14 +3327,81 @@
       </p:sp>
       <p:sp>
         <p:nvSpPr>
-          <p:cNvPr id="8" name="TextBox 7"/>
+          <p:cNvPr id="8" name="Rounded Rectangle 7"/>
+          <p:cNvSpPr/>
+          <p:nvPr/>
+        </p:nvSpPr>
+        <p:spPr>
+          <a:xfrm>
+            <a:off x="932688" y="3456432"/>
+            <a:ext cx="475488" cy="475488"/>
+          </a:xfrm>
+          <a:prstGeom prst="roundRect">
+            <a:avLst/>
+          </a:prstGeom>
+          <a:solidFill>
+            <a:srgbClr val="123230"/>
+          </a:solidFill>
+          <a:ln>
+            <a:noFill/>
+          </a:ln>
+        </p:spPr>
+        <p:style>
+          <a:lnRef idx="1">
+            <a:schemeClr val="accent1"/>
+          </a:lnRef>
+          <a:fillRef idx="3">
+            <a:schemeClr val="accent1"/>
+          </a:fillRef>
+          <a:effectRef idx="2">
+            <a:schemeClr val="accent1"/>
+          </a:effectRef>
+          <a:fontRef idx="minor">
+            <a:schemeClr val="lt1"/>
+          </a:fontRef>
+        </p:style>
+        <p:txBody>
+          <a:bodyPr rtlCol="0" anchor="ctr"/>
+          <a:lstStyle/>
+          <a:p>
+            <a:pPr algn="ctr"/>
+          </a:p>
+        </p:txBody>
+      </p:sp>
+      <p:pic>
+        <p:nvPicPr>
+          <p:cNvPr id="9" name="Picture 8" descr="camera_emerald.png"/>
+          <p:cNvPicPr>
+            <a:picLocks noChangeAspect="1"/>
+          </p:cNvPicPr>
+          <p:nvPr/>
+        </p:nvPicPr>
+        <p:blipFill>
+          <a:blip r:embed="rId2"/>
+          <a:stretch>
+            <a:fillRect/>
+          </a:stretch>
+        </p:blipFill>
+        <p:spPr>
+          <a:xfrm>
+            <a:off x="987552" y="3511296"/>
+            <a:ext cx="365760" cy="365760"/>
+          </a:xfrm>
+          <a:prstGeom prst="rect">
+            <a:avLst/>
+          </a:prstGeom>
+        </p:spPr>
+      </p:pic>
+      <p:sp>
+        <p:nvSpPr>
+          <p:cNvPr id="10" name="TextBox 9"/>
           <p:cNvSpPr txBox="1"/>
           <p:nvPr/>
         </p:nvSpPr>
         <p:spPr>
           <a:xfrm>
-            <a:off x="868680" y="3703320"/>
-            <a:ext cx="2240280" cy="2286000"/>
+            <a:off x="932688" y="4023360"/>
+            <a:ext cx="2112264" cy="2057400"/>
           </a:xfrm>
           <a:prstGeom prst="rect">
             <a:avLst/>
@@ -3342,16 +3409,16 @@
           <a:noFill/>
         </p:spPr>
         <p:txBody>
-          <a:bodyPr wrap="square">
+          <a:bodyPr wrap="square" lIns="0" tIns="0" rIns="0" bIns="0">
             <a:spAutoFit/>
           </a:bodyPr>
           <a:lstStyle/>
           <a:p>
             <a:pPr>
               <a:spcAft>
-                <a:spcPts val="600"/>
+                <a:spcPts val="300"/>
               </a:spcAft>
-              <a:defRPr sz="1500" b="1">
+              <a:defRPr sz="1450" b="1">
                 <a:solidFill>
                   <a:srgbClr val="F8FAFC"/>
                 </a:solidFill>
@@ -3364,7 +3431,7 @@
           <a:p>
             <a:pPr>
               <a:spcAft>
-                <a:spcPts val="600"/>
+                <a:spcPts val="400"/>
               </a:spcAft>
               <a:defRPr sz="950" b="1">
                 <a:solidFill>
@@ -3378,7 +3445,7 @@
           </a:p>
           <a:p>
             <a:pPr>
-              <a:defRPr sz="1150">
+              <a:defRPr sz="1100">
                 <a:solidFill>
                   <a:srgbClr val="94A3B8"/>
                 </a:solidFill>
@@ -3392,14 +3459,14 @@
       </p:sp>
       <p:sp>
         <p:nvSpPr>
-          <p:cNvPr id="9" name="Rounded Rectangle 8"/>
+          <p:cNvPr id="11" name="Rounded Rectangle 10"/>
           <p:cNvSpPr/>
           <p:nvPr/>
         </p:nvSpPr>
         <p:spPr>
           <a:xfrm>
-            <a:off x="3456432" y="3566160"/>
-            <a:ext cx="2514600" cy="2560320"/>
+            <a:off x="3456432" y="3291840"/>
+            <a:ext cx="2514600" cy="2926080"/>
           </a:xfrm>
           <a:prstGeom prst="roundRect">
             <a:avLst/>
@@ -3437,14 +3504,81 @@
       </p:sp>
       <p:sp>
         <p:nvSpPr>
-          <p:cNvPr id="10" name="TextBox 9"/>
+          <p:cNvPr id="12" name="Rounded Rectangle 11"/>
+          <p:cNvSpPr/>
+          <p:nvPr/>
+        </p:nvSpPr>
+        <p:spPr>
+          <a:xfrm>
+            <a:off x="3657600" y="3456432"/>
+            <a:ext cx="475488" cy="475488"/>
+          </a:xfrm>
+          <a:prstGeom prst="roundRect">
+            <a:avLst/>
+          </a:prstGeom>
+          <a:solidFill>
+            <a:srgbClr val="3A1C20"/>
+          </a:solidFill>
+          <a:ln>
+            <a:noFill/>
+          </a:ln>
+        </p:spPr>
+        <p:style>
+          <a:lnRef idx="1">
+            <a:schemeClr val="accent1"/>
+          </a:lnRef>
+          <a:fillRef idx="3">
+            <a:schemeClr val="accent1"/>
+          </a:fillRef>
+          <a:effectRef idx="2">
+            <a:schemeClr val="accent1"/>
+          </a:effectRef>
+          <a:fontRef idx="minor">
+            <a:schemeClr val="lt1"/>
+          </a:fontRef>
+        </p:style>
+        <p:txBody>
+          <a:bodyPr rtlCol="0" anchor="ctr"/>
+          <a:lstStyle/>
+          <a:p>
+            <a:pPr algn="ctr"/>
+          </a:p>
+        </p:txBody>
+      </p:sp>
+      <p:pic>
+        <p:nvPicPr>
+          <p:cNvPr id="13" name="Picture 12" descr="shield_coral.png"/>
+          <p:cNvPicPr>
+            <a:picLocks noChangeAspect="1"/>
+          </p:cNvPicPr>
+          <p:nvPr/>
+        </p:nvPicPr>
+        <p:blipFill>
+          <a:blip r:embed="rId3"/>
+          <a:stretch>
+            <a:fillRect/>
+          </a:stretch>
+        </p:blipFill>
+        <p:spPr>
+          <a:xfrm>
+            <a:off x="3712464" y="3511296"/>
+            <a:ext cx="365760" cy="365760"/>
+          </a:xfrm>
+          <a:prstGeom prst="rect">
+            <a:avLst/>
+          </a:prstGeom>
+        </p:spPr>
+      </p:pic>
+      <p:sp>
+        <p:nvSpPr>
+          <p:cNvPr id="14" name="TextBox 13"/>
           <p:cNvSpPr txBox="1"/>
           <p:nvPr/>
         </p:nvSpPr>
         <p:spPr>
           <a:xfrm>
-            <a:off x="3593592" y="3703320"/>
-            <a:ext cx="2240280" cy="2286000"/>
+            <a:off x="3657600" y="4023360"/>
+            <a:ext cx="2112264" cy="2057400"/>
           </a:xfrm>
           <a:prstGeom prst="rect">
             <a:avLst/>
@@ -3452,16 +3586,16 @@
           <a:noFill/>
         </p:spPr>
         <p:txBody>
-          <a:bodyPr wrap="square">
+          <a:bodyPr wrap="square" lIns="0" tIns="0" rIns="0" bIns="0">
             <a:spAutoFit/>
           </a:bodyPr>
           <a:lstStyle/>
           <a:p>
             <a:pPr>
               <a:spcAft>
-                <a:spcPts val="600"/>
+                <a:spcPts val="300"/>
               </a:spcAft>
-              <a:defRPr sz="1500" b="1">
+              <a:defRPr sz="1450" b="1">
                 <a:solidFill>
                   <a:srgbClr val="F8FAFC"/>
                 </a:solidFill>
@@ -3474,7 +3608,7 @@
           <a:p>
             <a:pPr>
               <a:spcAft>
-                <a:spcPts val="600"/>
+                <a:spcPts val="400"/>
               </a:spcAft>
               <a:defRPr sz="950" b="1">
                 <a:solidFill>
@@ -3488,7 +3622,7 @@
           </a:p>
           <a:p>
             <a:pPr>
-              <a:defRPr sz="1150">
+              <a:defRPr sz="1100">
                 <a:solidFill>
                   <a:srgbClr val="94A3B8"/>
                 </a:solidFill>
@@ -3502,14 +3636,14 @@
       </p:sp>
       <p:sp>
         <p:nvSpPr>
-          <p:cNvPr id="11" name="Rounded Rectangle 10"/>
+          <p:cNvPr id="15" name="Rounded Rectangle 14"/>
           <p:cNvSpPr/>
           <p:nvPr/>
         </p:nvSpPr>
         <p:spPr>
           <a:xfrm>
-            <a:off x="6181344" y="3566160"/>
-            <a:ext cx="2514600" cy="2560320"/>
+            <a:off x="6181344" y="3291840"/>
+            <a:ext cx="2514600" cy="2926080"/>
           </a:xfrm>
           <a:prstGeom prst="roundRect">
             <a:avLst/>
@@ -3547,14 +3681,81 @@
       </p:sp>
       <p:sp>
         <p:nvSpPr>
-          <p:cNvPr id="12" name="TextBox 11"/>
+          <p:cNvPr id="16" name="Rounded Rectangle 15"/>
+          <p:cNvSpPr/>
+          <p:nvPr/>
+        </p:nvSpPr>
+        <p:spPr>
+          <a:xfrm>
+            <a:off x="6382512" y="3456432"/>
+            <a:ext cx="475488" cy="475488"/>
+          </a:xfrm>
+          <a:prstGeom prst="roundRect">
+            <a:avLst/>
+          </a:prstGeom>
+          <a:solidFill>
+            <a:srgbClr val="103040"/>
+          </a:solidFill>
+          <a:ln>
+            <a:noFill/>
+          </a:ln>
+        </p:spPr>
+        <p:style>
+          <a:lnRef idx="1">
+            <a:schemeClr val="accent1"/>
+          </a:lnRef>
+          <a:fillRef idx="3">
+            <a:schemeClr val="accent1"/>
+          </a:fillRef>
+          <a:effectRef idx="2">
+            <a:schemeClr val="accent1"/>
+          </a:effectRef>
+          <a:fontRef idx="minor">
+            <a:schemeClr val="lt1"/>
+          </a:fontRef>
+        </p:style>
+        <p:txBody>
+          <a:bodyPr rtlCol="0" anchor="ctr"/>
+          <a:lstStyle/>
+          <a:p>
+            <a:pPr algn="ctr"/>
+          </a:p>
+        </p:txBody>
+      </p:sp>
+      <p:pic>
+        <p:nvPicPr>
+          <p:cNvPr id="17" name="Picture 16" descr="moon_cyan.png"/>
+          <p:cNvPicPr>
+            <a:picLocks noChangeAspect="1"/>
+          </p:cNvPicPr>
+          <p:nvPr/>
+        </p:nvPicPr>
+        <p:blipFill>
+          <a:blip r:embed="rId4"/>
+          <a:stretch>
+            <a:fillRect/>
+          </a:stretch>
+        </p:blipFill>
+        <p:spPr>
+          <a:xfrm>
+            <a:off x="6437376" y="3511296"/>
+            <a:ext cx="365760" cy="365760"/>
+          </a:xfrm>
+          <a:prstGeom prst="rect">
+            <a:avLst/>
+          </a:prstGeom>
+        </p:spPr>
+      </p:pic>
+      <p:sp>
+        <p:nvSpPr>
+          <p:cNvPr id="18" name="TextBox 17"/>
           <p:cNvSpPr txBox="1"/>
           <p:nvPr/>
         </p:nvSpPr>
         <p:spPr>
           <a:xfrm>
-            <a:off x="6318504" y="3703320"/>
-            <a:ext cx="2240280" cy="2286000"/>
+            <a:off x="6382512" y="4023360"/>
+            <a:ext cx="2112264" cy="2057400"/>
           </a:xfrm>
           <a:prstGeom prst="rect">
             <a:avLst/>
@@ -3562,16 +3763,16 @@
           <a:noFill/>
         </p:spPr>
         <p:txBody>
-          <a:bodyPr wrap="square">
+          <a:bodyPr wrap="square" lIns="0" tIns="0" rIns="0" bIns="0">
             <a:spAutoFit/>
           </a:bodyPr>
           <a:lstStyle/>
           <a:p>
             <a:pPr>
               <a:spcAft>
-                <a:spcPts val="600"/>
+                <a:spcPts val="300"/>
               </a:spcAft>
-              <a:defRPr sz="1500" b="1">
+              <a:defRPr sz="1450" b="1">
                 <a:solidFill>
                   <a:srgbClr val="F8FAFC"/>
                 </a:solidFill>
@@ -3584,7 +3785,7 @@
           <a:p>
             <a:pPr>
               <a:spcAft>
-                <a:spcPts val="600"/>
+                <a:spcPts val="400"/>
               </a:spcAft>
               <a:defRPr sz="950" b="1">
                 <a:solidFill>
@@ -3598,7 +3799,7 @@
           </a:p>
           <a:p>
             <a:pPr>
-              <a:defRPr sz="1150">
+              <a:defRPr sz="1100">
                 <a:solidFill>
                   <a:srgbClr val="94A3B8"/>
                 </a:solidFill>
@@ -3612,14 +3813,14 @@
       </p:sp>
       <p:sp>
         <p:nvSpPr>
-          <p:cNvPr id="13" name="Rounded Rectangle 12"/>
+          <p:cNvPr id="19" name="Rounded Rectangle 18"/>
           <p:cNvSpPr/>
           <p:nvPr/>
         </p:nvSpPr>
         <p:spPr>
           <a:xfrm>
-            <a:off x="8906256" y="3566160"/>
-            <a:ext cx="2514600" cy="2560320"/>
+            <a:off x="8906256" y="3291840"/>
+            <a:ext cx="2514600" cy="2926080"/>
           </a:xfrm>
           <a:prstGeom prst="roundRect">
             <a:avLst/>
@@ -3657,14 +3858,81 @@
       </p:sp>
       <p:sp>
         <p:nvSpPr>
-          <p:cNvPr id="14" name="TextBox 13"/>
+          <p:cNvPr id="20" name="Rounded Rectangle 19"/>
+          <p:cNvSpPr/>
+          <p:nvPr/>
+        </p:nvSpPr>
+        <p:spPr>
+          <a:xfrm>
+            <a:off x="9107424" y="3456432"/>
+            <a:ext cx="475488" cy="475488"/>
+          </a:xfrm>
+          <a:prstGeom prst="roundRect">
+            <a:avLst/>
+          </a:prstGeom>
+          <a:solidFill>
+            <a:srgbClr val="382C14"/>
+          </a:solidFill>
+          <a:ln>
+            <a:noFill/>
+          </a:ln>
+        </p:spPr>
+        <p:style>
+          <a:lnRef idx="1">
+            <a:schemeClr val="accent1"/>
+          </a:lnRef>
+          <a:fillRef idx="3">
+            <a:schemeClr val="accent1"/>
+          </a:fillRef>
+          <a:effectRef idx="2">
+            <a:schemeClr val="accent1"/>
+          </a:effectRef>
+          <a:fontRef idx="minor">
+            <a:schemeClr val="lt1"/>
+          </a:fontRef>
+        </p:style>
+        <p:txBody>
+          <a:bodyPr rtlCol="0" anchor="ctr"/>
+          <a:lstStyle/>
+          <a:p>
+            <a:pPr algn="ctr"/>
+          </a:p>
+        </p:txBody>
+      </p:sp>
+      <p:pic>
+        <p:nvPicPr>
+          <p:cNvPr id="21" name="Picture 20" descr="users_amber.png"/>
+          <p:cNvPicPr>
+            <a:picLocks noChangeAspect="1"/>
+          </p:cNvPicPr>
+          <p:nvPr/>
+        </p:nvPicPr>
+        <p:blipFill>
+          <a:blip r:embed="rId5"/>
+          <a:stretch>
+            <a:fillRect/>
+          </a:stretch>
+        </p:blipFill>
+        <p:spPr>
+          <a:xfrm>
+            <a:off x="9162288" y="3511296"/>
+            <a:ext cx="365760" cy="365760"/>
+          </a:xfrm>
+          <a:prstGeom prst="rect">
+            <a:avLst/>
+          </a:prstGeom>
+        </p:spPr>
+      </p:pic>
+      <p:sp>
+        <p:nvSpPr>
+          <p:cNvPr id="22" name="TextBox 21"/>
           <p:cNvSpPr txBox="1"/>
           <p:nvPr/>
         </p:nvSpPr>
         <p:spPr>
           <a:xfrm>
-            <a:off x="9043416" y="3703320"/>
-            <a:ext cx="2240280" cy="2286000"/>
+            <a:off x="9107424" y="4023360"/>
+            <a:ext cx="2112264" cy="2057400"/>
           </a:xfrm>
           <a:prstGeom prst="rect">
             <a:avLst/>
@@ -3672,16 +3940,16 @@
           <a:noFill/>
         </p:spPr>
         <p:txBody>
-          <a:bodyPr wrap="square">
+          <a:bodyPr wrap="square" lIns="0" tIns="0" rIns="0" bIns="0">
             <a:spAutoFit/>
           </a:bodyPr>
           <a:lstStyle/>
           <a:p>
             <a:pPr>
               <a:spcAft>
-                <a:spcPts val="600"/>
+                <a:spcPts val="300"/>
               </a:spcAft>
-              <a:defRPr sz="1500" b="1">
+              <a:defRPr sz="1450" b="1">
                 <a:solidFill>
                   <a:srgbClr val="F8FAFC"/>
                 </a:solidFill>
@@ -3694,7 +3962,7 @@
           <a:p>
             <a:pPr>
               <a:spcAft>
-                <a:spcPts val="600"/>
+                <a:spcPts val="400"/>
               </a:spcAft>
               <a:defRPr sz="950" b="1">
                 <a:solidFill>
@@ -3708,7 +3976,7 @@
           </a:p>
           <a:p>
             <a:pPr>
-              <a:defRPr sz="1150">
+              <a:defRPr sz="1100">
                 <a:solidFill>
                   <a:srgbClr val="94A3B8"/>
                 </a:solidFill>
@@ -3789,8 +4057,8 @@
         </p:nvSpPr>
         <p:spPr>
           <a:xfrm>
-            <a:off x="731520" y="457200"/>
-            <a:ext cx="10698480" cy="365760"/>
+            <a:off x="731520" y="411480"/>
+            <a:ext cx="10698480" cy="320040"/>
           </a:xfrm>
           <a:prstGeom prst="rect">
             <a:avLst/>
@@ -3798,7 +4066,7 @@
           <a:noFill/>
         </p:spPr>
         <p:txBody>
-          <a:bodyPr wrap="square">
+          <a:bodyPr wrap="square" lIns="0" tIns="0" rIns="0" bIns="0">
             <a:spAutoFit/>
           </a:bodyPr>
           <a:lstStyle/>
@@ -3824,8 +4092,8 @@
         </p:nvSpPr>
         <p:spPr>
           <a:xfrm>
-            <a:off x="731520" y="777240"/>
-            <a:ext cx="10698480" cy="731520"/>
+            <a:off x="731520" y="731520"/>
+            <a:ext cx="10698480" cy="685800"/>
           </a:xfrm>
           <a:prstGeom prst="rect">
             <a:avLst/>
@@ -3833,13 +4101,13 @@
           <a:noFill/>
         </p:spPr>
         <p:txBody>
-          <a:bodyPr wrap="square">
+          <a:bodyPr wrap="square" lIns="0" tIns="0" rIns="0" bIns="0">
             <a:spAutoFit/>
           </a:bodyPr>
           <a:lstStyle/>
           <a:p>
             <a:pPr>
-              <a:defRPr sz="2600" b="1">
+              <a:defRPr sz="2400" b="1">
                 <a:solidFill>
                   <a:srgbClr val="F8FAFC"/>
                 </a:solidFill>
@@ -3859,7 +4127,7 @@
         </p:nvSpPr>
         <p:spPr>
           <a:xfrm>
-            <a:off x="731520" y="1645920"/>
+            <a:off x="731520" y="1600200"/>
             <a:ext cx="3383280" cy="2926080"/>
           </a:xfrm>
           <a:prstGeom prst="roundRect">
@@ -3898,14 +4166,81 @@
       </p:sp>
       <p:sp>
         <p:nvSpPr>
-          <p:cNvPr id="6" name="TextBox 5"/>
+          <p:cNvPr id="6" name="Rounded Rectangle 5"/>
+          <p:cNvSpPr/>
+          <p:nvPr/>
+        </p:nvSpPr>
+        <p:spPr>
+          <a:xfrm>
+            <a:off x="932688" y="1764792"/>
+            <a:ext cx="475488" cy="475488"/>
+          </a:xfrm>
+          <a:prstGeom prst="roundRect">
+            <a:avLst/>
+          </a:prstGeom>
+          <a:solidFill>
+            <a:srgbClr val="123230"/>
+          </a:solidFill>
+          <a:ln>
+            <a:noFill/>
+          </a:ln>
+        </p:spPr>
+        <p:style>
+          <a:lnRef idx="1">
+            <a:schemeClr val="accent1"/>
+          </a:lnRef>
+          <a:fillRef idx="3">
+            <a:schemeClr val="accent1"/>
+          </a:fillRef>
+          <a:effectRef idx="2">
+            <a:schemeClr val="accent1"/>
+          </a:effectRef>
+          <a:fontRef idx="minor">
+            <a:schemeClr val="lt1"/>
+          </a:fontRef>
+        </p:style>
+        <p:txBody>
+          <a:bodyPr rtlCol="0" anchor="ctr"/>
+          <a:lstStyle/>
+          <a:p>
+            <a:pPr algn="ctr"/>
+          </a:p>
+        </p:txBody>
+      </p:sp>
+      <p:pic>
+        <p:nvPicPr>
+          <p:cNvPr id="7" name="Picture 6" descr="globe_emerald.png"/>
+          <p:cNvPicPr>
+            <a:picLocks noChangeAspect="1"/>
+          </p:cNvPicPr>
+          <p:nvPr/>
+        </p:nvPicPr>
+        <p:blipFill>
+          <a:blip r:embed="rId2"/>
+          <a:stretch>
+            <a:fillRect/>
+          </a:stretch>
+        </p:blipFill>
+        <p:spPr>
+          <a:xfrm>
+            <a:off x="987552" y="1819656"/>
+            <a:ext cx="365760" cy="365760"/>
+          </a:xfrm>
+          <a:prstGeom prst="rect">
+            <a:avLst/>
+          </a:prstGeom>
+        </p:spPr>
+      </p:pic>
+      <p:sp>
+        <p:nvSpPr>
+          <p:cNvPr id="8" name="TextBox 7"/>
           <p:cNvSpPr txBox="1"/>
           <p:nvPr/>
         </p:nvSpPr>
         <p:spPr>
           <a:xfrm>
-            <a:off x="868680" y="1783080"/>
-            <a:ext cx="3108960" cy="2651760"/>
+            <a:off x="932688" y="2331720"/>
+            <a:ext cx="2980944" cy="2057400"/>
           </a:xfrm>
           <a:prstGeom prst="rect">
             <a:avLst/>
@@ -3913,16 +4248,16 @@
           <a:noFill/>
         </p:spPr>
         <p:txBody>
-          <a:bodyPr wrap="square">
+          <a:bodyPr wrap="square" lIns="0" tIns="0" rIns="0" bIns="0">
             <a:spAutoFit/>
           </a:bodyPr>
           <a:lstStyle/>
           <a:p>
             <a:pPr>
               <a:spcAft>
-                <a:spcPts val="600"/>
+                <a:spcPts val="300"/>
               </a:spcAft>
-              <a:defRPr sz="1500" b="1">
+              <a:defRPr sz="1450" b="1">
                 <a:solidFill>
                   <a:srgbClr val="F8FAFC"/>
                 </a:solidFill>
@@ -3935,7 +4270,7 @@
           <a:p>
             <a:pPr>
               <a:spcAft>
-                <a:spcPts val="600"/>
+                <a:spcPts val="400"/>
               </a:spcAft>
               <a:defRPr sz="950" b="1">
                 <a:solidFill>
@@ -3949,7 +4284,7 @@
           </a:p>
           <a:p>
             <a:pPr>
-              <a:defRPr sz="1150">
+              <a:defRPr sz="1100">
                 <a:solidFill>
                   <a:srgbClr val="94A3B8"/>
                 </a:solidFill>
@@ -3963,13 +4298,13 @@
       </p:sp>
       <p:sp>
         <p:nvSpPr>
-          <p:cNvPr id="7" name="Rounded Rectangle 6"/>
+          <p:cNvPr id="9" name="Rounded Rectangle 8"/>
           <p:cNvSpPr/>
           <p:nvPr/>
         </p:nvSpPr>
         <p:spPr>
           <a:xfrm>
-            <a:off x="4389120" y="1645920"/>
+            <a:off x="4389120" y="1600200"/>
             <a:ext cx="3383280" cy="2926080"/>
           </a:xfrm>
           <a:prstGeom prst="roundRect">
@@ -4008,14 +4343,81 @@
       </p:sp>
       <p:sp>
         <p:nvSpPr>
-          <p:cNvPr id="8" name="TextBox 7"/>
+          <p:cNvPr id="10" name="Rounded Rectangle 9"/>
+          <p:cNvSpPr/>
+          <p:nvPr/>
+        </p:nvSpPr>
+        <p:spPr>
+          <a:xfrm>
+            <a:off x="4590288" y="1764792"/>
+            <a:ext cx="475488" cy="475488"/>
+          </a:xfrm>
+          <a:prstGeom prst="roundRect">
+            <a:avLst/>
+          </a:prstGeom>
+          <a:solidFill>
+            <a:srgbClr val="103040"/>
+          </a:solidFill>
+          <a:ln>
+            <a:noFill/>
+          </a:ln>
+        </p:spPr>
+        <p:style>
+          <a:lnRef idx="1">
+            <a:schemeClr val="accent1"/>
+          </a:lnRef>
+          <a:fillRef idx="3">
+            <a:schemeClr val="accent1"/>
+          </a:fillRef>
+          <a:effectRef idx="2">
+            <a:schemeClr val="accent1"/>
+          </a:effectRef>
+          <a:fontRef idx="minor">
+            <a:schemeClr val="lt1"/>
+          </a:fontRef>
+        </p:style>
+        <p:txBody>
+          <a:bodyPr rtlCol="0" anchor="ctr"/>
+          <a:lstStyle/>
+          <a:p>
+            <a:pPr algn="ctr"/>
+          </a:p>
+        </p:txBody>
+      </p:sp>
+      <p:pic>
+        <p:nvPicPr>
+          <p:cNvPr id="11" name="Picture 10" descr="briefcase_cyan.png"/>
+          <p:cNvPicPr>
+            <a:picLocks noChangeAspect="1"/>
+          </p:cNvPicPr>
+          <p:nvPr/>
+        </p:nvPicPr>
+        <p:blipFill>
+          <a:blip r:embed="rId3"/>
+          <a:stretch>
+            <a:fillRect/>
+          </a:stretch>
+        </p:blipFill>
+        <p:spPr>
+          <a:xfrm>
+            <a:off x="4645152" y="1819656"/>
+            <a:ext cx="365760" cy="365760"/>
+          </a:xfrm>
+          <a:prstGeom prst="rect">
+            <a:avLst/>
+          </a:prstGeom>
+        </p:spPr>
+      </p:pic>
+      <p:sp>
+        <p:nvSpPr>
+          <p:cNvPr id="12" name="TextBox 11"/>
           <p:cNvSpPr txBox="1"/>
           <p:nvPr/>
         </p:nvSpPr>
         <p:spPr>
           <a:xfrm>
-            <a:off x="4526280" y="1783080"/>
-            <a:ext cx="3108960" cy="2651760"/>
+            <a:off x="4590288" y="2331720"/>
+            <a:ext cx="2980944" cy="2057400"/>
           </a:xfrm>
           <a:prstGeom prst="rect">
             <a:avLst/>
@@ -4023,16 +4425,16 @@
           <a:noFill/>
         </p:spPr>
         <p:txBody>
-          <a:bodyPr wrap="square">
+          <a:bodyPr wrap="square" lIns="0" tIns="0" rIns="0" bIns="0">
             <a:spAutoFit/>
           </a:bodyPr>
           <a:lstStyle/>
           <a:p>
             <a:pPr>
               <a:spcAft>
-                <a:spcPts val="600"/>
+                <a:spcPts val="300"/>
               </a:spcAft>
-              <a:defRPr sz="1500" b="1">
+              <a:defRPr sz="1450" b="1">
                 <a:solidFill>
                   <a:srgbClr val="F8FAFC"/>
                 </a:solidFill>
@@ -4045,7 +4447,7 @@
           <a:p>
             <a:pPr>
               <a:spcAft>
-                <a:spcPts val="600"/>
+                <a:spcPts val="400"/>
               </a:spcAft>
               <a:defRPr sz="950" b="1">
                 <a:solidFill>
@@ -4059,7 +4461,7 @@
           </a:p>
           <a:p>
             <a:pPr>
-              <a:defRPr sz="1150">
+              <a:defRPr sz="1100">
                 <a:solidFill>
                   <a:srgbClr val="94A3B8"/>
                 </a:solidFill>
@@ -4077,13 +4479,13 @@
       </p:sp>
       <p:sp>
         <p:nvSpPr>
-          <p:cNvPr id="9" name="Rounded Rectangle 8"/>
+          <p:cNvPr id="13" name="Rounded Rectangle 12"/>
           <p:cNvSpPr/>
           <p:nvPr/>
         </p:nvSpPr>
         <p:spPr>
           <a:xfrm>
-            <a:off x="8046720" y="1645920"/>
+            <a:off x="8046720" y="1600200"/>
             <a:ext cx="3383280" cy="2926080"/>
           </a:xfrm>
           <a:prstGeom prst="roundRect">
@@ -4122,14 +4524,81 @@
       </p:sp>
       <p:sp>
         <p:nvSpPr>
-          <p:cNvPr id="10" name="TextBox 9"/>
+          <p:cNvPr id="14" name="Rounded Rectangle 13"/>
+          <p:cNvSpPr/>
+          <p:nvPr/>
+        </p:nvSpPr>
+        <p:spPr>
+          <a:xfrm>
+            <a:off x="8247888" y="1764792"/>
+            <a:ext cx="475488" cy="475488"/>
+          </a:xfrm>
+          <a:prstGeom prst="roundRect">
+            <a:avLst/>
+          </a:prstGeom>
+          <a:solidFill>
+            <a:srgbClr val="382C14"/>
+          </a:solidFill>
+          <a:ln>
+            <a:noFill/>
+          </a:ln>
+        </p:spPr>
+        <p:style>
+          <a:lnRef idx="1">
+            <a:schemeClr val="accent1"/>
+          </a:lnRef>
+          <a:fillRef idx="3">
+            <a:schemeClr val="accent1"/>
+          </a:fillRef>
+          <a:effectRef idx="2">
+            <a:schemeClr val="accent1"/>
+          </a:effectRef>
+          <a:fontRef idx="minor">
+            <a:schemeClr val="lt1"/>
+          </a:fontRef>
+        </p:style>
+        <p:txBody>
+          <a:bodyPr rtlCol="0" anchor="ctr"/>
+          <a:lstStyle/>
+          <a:p>
+            <a:pPr algn="ctr"/>
+          </a:p>
+        </p:txBody>
+      </p:sp>
+      <p:pic>
+        <p:nvPicPr>
+          <p:cNvPr id="15" name="Picture 14" descr="rocket_amber.png"/>
+          <p:cNvPicPr>
+            <a:picLocks noChangeAspect="1"/>
+          </p:cNvPicPr>
+          <p:nvPr/>
+        </p:nvPicPr>
+        <p:blipFill>
+          <a:blip r:embed="rId4"/>
+          <a:stretch>
+            <a:fillRect/>
+          </a:stretch>
+        </p:blipFill>
+        <p:spPr>
+          <a:xfrm>
+            <a:off x="8302752" y="1819656"/>
+            <a:ext cx="365760" cy="365760"/>
+          </a:xfrm>
+          <a:prstGeom prst="rect">
+            <a:avLst/>
+          </a:prstGeom>
+        </p:spPr>
+      </p:pic>
+      <p:sp>
+        <p:nvSpPr>
+          <p:cNvPr id="16" name="TextBox 15"/>
           <p:cNvSpPr txBox="1"/>
           <p:nvPr/>
         </p:nvSpPr>
         <p:spPr>
           <a:xfrm>
-            <a:off x="8183880" y="1783080"/>
-            <a:ext cx="3108960" cy="2651760"/>
+            <a:off x="8247888" y="2331720"/>
+            <a:ext cx="2980944" cy="2057400"/>
           </a:xfrm>
           <a:prstGeom prst="rect">
             <a:avLst/>
@@ -4137,16 +4606,16 @@
           <a:noFill/>
         </p:spPr>
         <p:txBody>
-          <a:bodyPr wrap="square">
+          <a:bodyPr wrap="square" lIns="0" tIns="0" rIns="0" bIns="0">
             <a:spAutoFit/>
           </a:bodyPr>
           <a:lstStyle/>
           <a:p>
             <a:pPr>
               <a:spcAft>
-                <a:spcPts val="600"/>
+                <a:spcPts val="300"/>
               </a:spcAft>
-              <a:defRPr sz="1500" b="1">
+              <a:defRPr sz="1450" b="1">
                 <a:solidFill>
                   <a:srgbClr val="F8FAFC"/>
                 </a:solidFill>
@@ -4159,7 +4628,7 @@
           <a:p>
             <a:pPr>
               <a:spcAft>
-                <a:spcPts val="600"/>
+                <a:spcPts val="400"/>
               </a:spcAft>
               <a:defRPr sz="950" b="1">
                 <a:solidFill>
@@ -4173,7 +4642,7 @@
           </a:p>
           <a:p>
             <a:pPr>
-              <a:defRPr sz="1150">
+              <a:defRPr sz="1100">
                 <a:solidFill>
                   <a:srgbClr val="94A3B8"/>
                 </a:solidFill>
@@ -4195,13 +4664,13 @@
       </p:sp>
       <p:sp>
         <p:nvSpPr>
-          <p:cNvPr id="11" name="Rounded Rectangle 10"/>
+          <p:cNvPr id="17" name="Rounded Rectangle 16"/>
           <p:cNvSpPr/>
           <p:nvPr/>
         </p:nvSpPr>
         <p:spPr>
           <a:xfrm>
-            <a:off x="731520" y="4846320"/>
+            <a:off x="731520" y="4800600"/>
             <a:ext cx="10698480" cy="1371600"/>
           </a:xfrm>
           <a:prstGeom prst="roundRect">
@@ -4240,13 +4709,13 @@
       </p:sp>
       <p:sp>
         <p:nvSpPr>
-          <p:cNvPr id="12" name="TextBox 11"/>
+          <p:cNvPr id="18" name="TextBox 17"/>
           <p:cNvSpPr txBox="1"/>
           <p:nvPr/>
         </p:nvSpPr>
         <p:spPr>
           <a:xfrm>
-            <a:off x="914400" y="4983480"/>
+            <a:off x="914400" y="4937760"/>
             <a:ext cx="10332720" cy="1097280"/>
           </a:xfrm>
           <a:prstGeom prst="rect">
@@ -4357,8 +4826,8 @@
         </p:nvSpPr>
         <p:spPr>
           <a:xfrm>
-            <a:off x="731520" y="457200"/>
-            <a:ext cx="10698480" cy="365760"/>
+            <a:off x="731520" y="411480"/>
+            <a:ext cx="10698480" cy="320040"/>
           </a:xfrm>
           <a:prstGeom prst="rect">
             <a:avLst/>
@@ -4366,7 +4835,7 @@
           <a:noFill/>
         </p:spPr>
         <p:txBody>
-          <a:bodyPr wrap="square">
+          <a:bodyPr wrap="square" lIns="0" tIns="0" rIns="0" bIns="0">
             <a:spAutoFit/>
           </a:bodyPr>
           <a:lstStyle/>
@@ -4392,8 +4861,8 @@
         </p:nvSpPr>
         <p:spPr>
           <a:xfrm>
-            <a:off x="731520" y="777240"/>
-            <a:ext cx="10698480" cy="731520"/>
+            <a:off x="731520" y="731520"/>
+            <a:ext cx="10698480" cy="685800"/>
           </a:xfrm>
           <a:prstGeom prst="rect">
             <a:avLst/>
@@ -4401,13 +4870,13 @@
           <a:noFill/>
         </p:spPr>
         <p:txBody>
-          <a:bodyPr wrap="square">
+          <a:bodyPr wrap="square" lIns="0" tIns="0" rIns="0" bIns="0">
             <a:spAutoFit/>
           </a:bodyPr>
           <a:lstStyle/>
           <a:p>
             <a:pPr>
-              <a:defRPr sz="2600" b="1">
+              <a:defRPr sz="2400" b="1">
                 <a:solidFill>
                   <a:srgbClr val="F8FAFC"/>
                 </a:solidFill>
@@ -4427,8 +4896,8 @@
         </p:nvSpPr>
         <p:spPr>
           <a:xfrm>
-            <a:off x="731520" y="1645920"/>
-            <a:ext cx="5212080" cy="2194560"/>
+            <a:off x="731520" y="1600200"/>
+            <a:ext cx="5212080" cy="2286000"/>
           </a:xfrm>
           <a:prstGeom prst="roundRect">
             <a:avLst/>
@@ -4466,14 +4935,81 @@
       </p:sp>
       <p:sp>
         <p:nvSpPr>
-          <p:cNvPr id="6" name="TextBox 5"/>
+          <p:cNvPr id="6" name="Rounded Rectangle 5"/>
+          <p:cNvSpPr/>
+          <p:nvPr/>
+        </p:nvSpPr>
+        <p:spPr>
+          <a:xfrm>
+            <a:off x="932688" y="1764792"/>
+            <a:ext cx="438912" cy="438912"/>
+          </a:xfrm>
+          <a:prstGeom prst="roundRect">
+            <a:avLst/>
+          </a:prstGeom>
+          <a:solidFill>
+            <a:srgbClr val="3A1C20"/>
+          </a:solidFill>
+          <a:ln>
+            <a:noFill/>
+          </a:ln>
+        </p:spPr>
+        <p:style>
+          <a:lnRef idx="1">
+            <a:schemeClr val="accent1"/>
+          </a:lnRef>
+          <a:fillRef idx="3">
+            <a:schemeClr val="accent1"/>
+          </a:fillRef>
+          <a:effectRef idx="2">
+            <a:schemeClr val="accent1"/>
+          </a:effectRef>
+          <a:fontRef idx="minor">
+            <a:schemeClr val="lt1"/>
+          </a:fontRef>
+        </p:style>
+        <p:txBody>
+          <a:bodyPr rtlCol="0" anchor="ctr"/>
+          <a:lstStyle/>
+          <a:p>
+            <a:pPr algn="ctr"/>
+          </a:p>
+        </p:txBody>
+      </p:sp>
+      <p:pic>
+        <p:nvPicPr>
+          <p:cNvPr id="7" name="Picture 6" descr="pulse_coral.png"/>
+          <p:cNvPicPr>
+            <a:picLocks noChangeAspect="1"/>
+          </p:cNvPicPr>
+          <p:nvPr/>
+        </p:nvPicPr>
+        <p:blipFill>
+          <a:blip r:embed="rId2"/>
+          <a:stretch>
+            <a:fillRect/>
+          </a:stretch>
+        </p:blipFill>
+        <p:spPr>
+          <a:xfrm>
+            <a:off x="987552" y="1819656"/>
+            <a:ext cx="329184" cy="329184"/>
+          </a:xfrm>
+          <a:prstGeom prst="rect">
+            <a:avLst/>
+          </a:prstGeom>
+        </p:spPr>
+      </p:pic>
+      <p:sp>
+        <p:nvSpPr>
+          <p:cNvPr id="8" name="TextBox 7"/>
           <p:cNvSpPr txBox="1"/>
           <p:nvPr/>
         </p:nvSpPr>
         <p:spPr>
           <a:xfrm>
-            <a:off x="868680" y="1783080"/>
-            <a:ext cx="4937760" cy="1920240"/>
+            <a:off x="1463040" y="1764792"/>
+            <a:ext cx="4297680" cy="1984248"/>
           </a:xfrm>
           <a:prstGeom prst="rect">
             <a:avLst/>
@@ -4481,16 +5017,16 @@
           <a:noFill/>
         </p:spPr>
         <p:txBody>
-          <a:bodyPr wrap="square">
+          <a:bodyPr wrap="square" lIns="0" tIns="0" rIns="0" bIns="0">
             <a:spAutoFit/>
           </a:bodyPr>
           <a:lstStyle/>
           <a:p>
             <a:pPr>
               <a:spcAft>
-                <a:spcPts val="600"/>
+                <a:spcPts val="300"/>
               </a:spcAft>
-              <a:defRPr sz="1500" b="1">
+              <a:defRPr sz="1450" b="1">
                 <a:solidFill>
                   <a:srgbClr val="F8FAFC"/>
                 </a:solidFill>
@@ -4503,7 +5039,7 @@
           <a:p>
             <a:pPr>
               <a:spcAft>
-                <a:spcPts val="600"/>
+                <a:spcPts val="400"/>
               </a:spcAft>
               <a:defRPr sz="950" b="1">
                 <a:solidFill>
@@ -4517,28 +5053,28 @@
           </a:p>
           <a:p>
             <a:pPr>
-              <a:defRPr sz="1150">
+              <a:defRPr sz="1100">
                 <a:solidFill>
                   <a:srgbClr val="94A3B8"/>
                 </a:solidFill>
               </a:defRPr>
             </a:pPr>
             <a:r>
-              <a:t>South Asians face disproportionately high rates of Type-2 Diabetes, Hypertension, and early CVD, often diagnosed 10 years earlier than global benchmarks.</a:t>
-            </a:r>
-          </a:p>
-        </p:txBody>
-      </p:sp>
-      <p:sp>
-        <p:nvSpPr>
-          <p:cNvPr id="7" name="Rounded Rectangle 6"/>
+              <a:t>South Asians face disproportionately high rates of Type-2 Diabetes, Hypertension, and early CVD, often diagnosed a full decade earlier than Western benchmarks.</a:t>
+            </a:r>
+          </a:p>
+        </p:txBody>
+      </p:sp>
+      <p:sp>
+        <p:nvSpPr>
+          <p:cNvPr id="9" name="Rounded Rectangle 8"/>
           <p:cNvSpPr/>
           <p:nvPr/>
         </p:nvSpPr>
         <p:spPr>
           <a:xfrm>
-            <a:off x="6217920" y="1645920"/>
-            <a:ext cx="5212080" cy="2194560"/>
+            <a:off x="6217920" y="1600200"/>
+            <a:ext cx="5212080" cy="2286000"/>
           </a:xfrm>
           <a:prstGeom prst="roundRect">
             <a:avLst/>
@@ -4576,14 +5112,81 @@
       </p:sp>
       <p:sp>
         <p:nvSpPr>
-          <p:cNvPr id="8" name="TextBox 7"/>
+          <p:cNvPr id="10" name="Rounded Rectangle 9"/>
+          <p:cNvSpPr/>
+          <p:nvPr/>
+        </p:nvSpPr>
+        <p:spPr>
+          <a:xfrm>
+            <a:off x="6419088" y="1764792"/>
+            <a:ext cx="438912" cy="438912"/>
+          </a:xfrm>
+          <a:prstGeom prst="roundRect">
+            <a:avLst/>
+          </a:prstGeom>
+          <a:solidFill>
+            <a:srgbClr val="382C14"/>
+          </a:solidFill>
+          <a:ln>
+            <a:noFill/>
+          </a:ln>
+        </p:spPr>
+        <p:style>
+          <a:lnRef idx="1">
+            <a:schemeClr val="accent1"/>
+          </a:lnRef>
+          <a:fillRef idx="3">
+            <a:schemeClr val="accent1"/>
+          </a:fillRef>
+          <a:effectRef idx="2">
+            <a:schemeClr val="accent1"/>
+          </a:effectRef>
+          <a:fontRef idx="minor">
+            <a:schemeClr val="lt1"/>
+          </a:fontRef>
+        </p:style>
+        <p:txBody>
+          <a:bodyPr rtlCol="0" anchor="ctr"/>
+          <a:lstStyle/>
+          <a:p>
+            <a:pPr algn="ctr"/>
+          </a:p>
+        </p:txBody>
+      </p:sp>
+      <p:pic>
+        <p:nvPicPr>
+          <p:cNvPr id="11" name="Picture 10" descr="food_amber.png"/>
+          <p:cNvPicPr>
+            <a:picLocks noChangeAspect="1"/>
+          </p:cNvPicPr>
+          <p:nvPr/>
+        </p:nvPicPr>
+        <p:blipFill>
+          <a:blip r:embed="rId3"/>
+          <a:stretch>
+            <a:fillRect/>
+          </a:stretch>
+        </p:blipFill>
+        <p:spPr>
+          <a:xfrm>
+            <a:off x="6473952" y="1819656"/>
+            <a:ext cx="329184" cy="329184"/>
+          </a:xfrm>
+          <a:prstGeom prst="rect">
+            <a:avLst/>
+          </a:prstGeom>
+        </p:spPr>
+      </p:pic>
+      <p:sp>
+        <p:nvSpPr>
+          <p:cNvPr id="12" name="TextBox 11"/>
           <p:cNvSpPr txBox="1"/>
           <p:nvPr/>
         </p:nvSpPr>
         <p:spPr>
           <a:xfrm>
-            <a:off x="6355080" y="1783080"/>
-            <a:ext cx="4937760" cy="1920240"/>
+            <a:off x="6949440" y="1764792"/>
+            <a:ext cx="4297680" cy="1984248"/>
           </a:xfrm>
           <a:prstGeom prst="rect">
             <a:avLst/>
@@ -4591,16 +5194,16 @@
           <a:noFill/>
         </p:spPr>
         <p:txBody>
-          <a:bodyPr wrap="square">
+          <a:bodyPr wrap="square" lIns="0" tIns="0" rIns="0" bIns="0">
             <a:spAutoFit/>
           </a:bodyPr>
           <a:lstStyle/>
           <a:p>
             <a:pPr>
               <a:spcAft>
-                <a:spcPts val="600"/>
+                <a:spcPts val="300"/>
               </a:spcAft>
-              <a:defRPr sz="1500" b="1">
+              <a:defRPr sz="1450" b="1">
                 <a:solidFill>
                   <a:srgbClr val="F8FAFC"/>
                 </a:solidFill>
@@ -4613,7 +5216,7 @@
           <a:p>
             <a:pPr>
               <a:spcAft>
-                <a:spcPts val="600"/>
+                <a:spcPts val="400"/>
               </a:spcAft>
               <a:defRPr sz="950" b="1">
                 <a:solidFill>
@@ -4627,7 +5230,7 @@
           </a:p>
           <a:p>
             <a:pPr>
-              <a:defRPr sz="1150">
+              <a:defRPr sz="1100">
                 <a:solidFill>
                   <a:srgbClr val="94A3B8"/>
                 </a:solidFill>
@@ -4641,14 +5244,14 @@
       </p:sp>
       <p:sp>
         <p:nvSpPr>
-          <p:cNvPr id="9" name="Rounded Rectangle 8"/>
+          <p:cNvPr id="13" name="Rounded Rectangle 12"/>
           <p:cNvSpPr/>
           <p:nvPr/>
         </p:nvSpPr>
         <p:spPr>
           <a:xfrm>
             <a:off x="731520" y="4114800"/>
-            <a:ext cx="5212080" cy="2194560"/>
+            <a:ext cx="5212080" cy="2286000"/>
           </a:xfrm>
           <a:prstGeom prst="roundRect">
             <a:avLst/>
@@ -4686,14 +5289,81 @@
       </p:sp>
       <p:sp>
         <p:nvSpPr>
-          <p:cNvPr id="10" name="TextBox 9"/>
+          <p:cNvPr id="14" name="Rounded Rectangle 13"/>
+          <p:cNvSpPr/>
+          <p:nvPr/>
+        </p:nvSpPr>
+        <p:spPr>
+          <a:xfrm>
+            <a:off x="932688" y="4279392"/>
+            <a:ext cx="438912" cy="438912"/>
+          </a:xfrm>
+          <a:prstGeom prst="roundRect">
+            <a:avLst/>
+          </a:prstGeom>
+          <a:solidFill>
+            <a:srgbClr val="3A1C20"/>
+          </a:solidFill>
+          <a:ln>
+            <a:noFill/>
+          </a:ln>
+        </p:spPr>
+        <p:style>
+          <a:lnRef idx="1">
+            <a:schemeClr val="accent1"/>
+          </a:lnRef>
+          <a:fillRef idx="3">
+            <a:schemeClr val="accent1"/>
+          </a:fillRef>
+          <a:effectRef idx="2">
+            <a:schemeClr val="accent1"/>
+          </a:effectRef>
+          <a:fontRef idx="minor">
+            <a:schemeClr val="lt1"/>
+          </a:fontRef>
+        </p:style>
+        <p:txBody>
+          <a:bodyPr rtlCol="0" anchor="ctr"/>
+          <a:lstStyle/>
+          <a:p>
+            <a:pPr algn="ctr"/>
+          </a:p>
+        </p:txBody>
+      </p:sp>
+      <p:pic>
+        <p:nvPicPr>
+          <p:cNvPr id="15" name="Picture 14" descr="warning_coral.png"/>
+          <p:cNvPicPr>
+            <a:picLocks noChangeAspect="1"/>
+          </p:cNvPicPr>
+          <p:nvPr/>
+        </p:nvPicPr>
+        <p:blipFill>
+          <a:blip r:embed="rId4"/>
+          <a:stretch>
+            <a:fillRect/>
+          </a:stretch>
+        </p:blipFill>
+        <p:spPr>
+          <a:xfrm>
+            <a:off x="987552" y="4334256"/>
+            <a:ext cx="329184" cy="329184"/>
+          </a:xfrm>
+          <a:prstGeom prst="rect">
+            <a:avLst/>
+          </a:prstGeom>
+        </p:spPr>
+      </p:pic>
+      <p:sp>
+        <p:nvSpPr>
+          <p:cNvPr id="16" name="TextBox 15"/>
           <p:cNvSpPr txBox="1"/>
           <p:nvPr/>
         </p:nvSpPr>
         <p:spPr>
           <a:xfrm>
-            <a:off x="868680" y="4251960"/>
-            <a:ext cx="4937760" cy="1920240"/>
+            <a:off x="1463040" y="4279392"/>
+            <a:ext cx="4297680" cy="1984248"/>
           </a:xfrm>
           <a:prstGeom prst="rect">
             <a:avLst/>
@@ -4701,16 +5371,16 @@
           <a:noFill/>
         </p:spPr>
         <p:txBody>
-          <a:bodyPr wrap="square">
+          <a:bodyPr wrap="square" lIns="0" tIns="0" rIns="0" bIns="0">
             <a:spAutoFit/>
           </a:bodyPr>
           <a:lstStyle/>
           <a:p>
             <a:pPr>
               <a:spcAft>
-                <a:spcPts val="600"/>
+                <a:spcPts val="300"/>
               </a:spcAft>
-              <a:defRPr sz="1500" b="1">
+              <a:defRPr sz="1450" b="1">
                 <a:solidFill>
                   <a:srgbClr val="F8FAFC"/>
                 </a:solidFill>
@@ -4723,7 +5393,7 @@
           <a:p>
             <a:pPr>
               <a:spcAft>
-                <a:spcPts val="600"/>
+                <a:spcPts val="400"/>
               </a:spcAft>
               <a:defRPr sz="950" b="1">
                 <a:solidFill>
@@ -4737,7 +5407,7 @@
           </a:p>
           <a:p>
             <a:pPr>
-              <a:defRPr sz="1150">
+              <a:defRPr sz="1100">
                 <a:solidFill>
                   <a:srgbClr val="94A3B8"/>
                 </a:solidFill>
@@ -4751,14 +5421,14 @@
       </p:sp>
       <p:sp>
         <p:nvSpPr>
-          <p:cNvPr id="11" name="Rounded Rectangle 10"/>
+          <p:cNvPr id="17" name="Rounded Rectangle 16"/>
           <p:cNvSpPr/>
           <p:nvPr/>
         </p:nvSpPr>
         <p:spPr>
           <a:xfrm>
             <a:off x="6217920" y="4114800"/>
-            <a:ext cx="5212080" cy="2194560"/>
+            <a:ext cx="5212080" cy="2286000"/>
           </a:xfrm>
           <a:prstGeom prst="roundRect">
             <a:avLst/>
@@ -4796,14 +5466,81 @@
       </p:sp>
       <p:sp>
         <p:nvSpPr>
-          <p:cNvPr id="12" name="TextBox 11"/>
+          <p:cNvPr id="18" name="Rounded Rectangle 17"/>
+          <p:cNvSpPr/>
+          <p:nvPr/>
+        </p:nvSpPr>
+        <p:spPr>
+          <a:xfrm>
+            <a:off x="6419088" y="4279392"/>
+            <a:ext cx="438912" cy="438912"/>
+          </a:xfrm>
+          <a:prstGeom prst="roundRect">
+            <a:avLst/>
+          </a:prstGeom>
+          <a:solidFill>
+            <a:srgbClr val="103040"/>
+          </a:solidFill>
+          <a:ln>
+            <a:noFill/>
+          </a:ln>
+        </p:spPr>
+        <p:style>
+          <a:lnRef idx="1">
+            <a:schemeClr val="accent1"/>
+          </a:lnRef>
+          <a:fillRef idx="3">
+            <a:schemeClr val="accent1"/>
+          </a:fillRef>
+          <a:effectRef idx="2">
+            <a:schemeClr val="accent1"/>
+          </a:effectRef>
+          <a:fontRef idx="minor">
+            <a:schemeClr val="lt1"/>
+          </a:fontRef>
+        </p:style>
+        <p:txBody>
+          <a:bodyPr rtlCol="0" anchor="ctr"/>
+          <a:lstStyle/>
+          <a:p>
+            <a:pPr algn="ctr"/>
+          </a:p>
+        </p:txBody>
+      </p:sp>
+      <p:pic>
+        <p:nvPicPr>
+          <p:cNvPr id="19" name="Picture 18" descr="phone_cyan.png"/>
+          <p:cNvPicPr>
+            <a:picLocks noChangeAspect="1"/>
+          </p:cNvPicPr>
+          <p:nvPr/>
+        </p:nvPicPr>
+        <p:blipFill>
+          <a:blip r:embed="rId5"/>
+          <a:stretch>
+            <a:fillRect/>
+          </a:stretch>
+        </p:blipFill>
+        <p:spPr>
+          <a:xfrm>
+            <a:off x="6473952" y="4334256"/>
+            <a:ext cx="329184" cy="329184"/>
+          </a:xfrm>
+          <a:prstGeom prst="rect">
+            <a:avLst/>
+          </a:prstGeom>
+        </p:spPr>
+      </p:pic>
+      <p:sp>
+        <p:nvSpPr>
+          <p:cNvPr id="20" name="TextBox 19"/>
           <p:cNvSpPr txBox="1"/>
           <p:nvPr/>
         </p:nvSpPr>
         <p:spPr>
           <a:xfrm>
-            <a:off x="6355080" y="4251960"/>
-            <a:ext cx="4937760" cy="1920240"/>
+            <a:off x="6949440" y="4279392"/>
+            <a:ext cx="4297680" cy="1984248"/>
           </a:xfrm>
           <a:prstGeom prst="rect">
             <a:avLst/>
@@ -4811,16 +5548,16 @@
           <a:noFill/>
         </p:spPr>
         <p:txBody>
-          <a:bodyPr wrap="square">
+          <a:bodyPr wrap="square" lIns="0" tIns="0" rIns="0" bIns="0">
             <a:spAutoFit/>
           </a:bodyPr>
           <a:lstStyle/>
           <a:p>
             <a:pPr>
               <a:spcAft>
-                <a:spcPts val="600"/>
+                <a:spcPts val="300"/>
               </a:spcAft>
-              <a:defRPr sz="1500" b="1">
+              <a:defRPr sz="1450" b="1">
                 <a:solidFill>
                   <a:srgbClr val="F8FAFC"/>
                 </a:solidFill>
@@ -4833,7 +5570,7 @@
           <a:p>
             <a:pPr>
               <a:spcAft>
-                <a:spcPts val="600"/>
+                <a:spcPts val="400"/>
               </a:spcAft>
               <a:defRPr sz="950" b="1">
                 <a:solidFill>
@@ -4847,14 +5584,14 @@
           </a:p>
           <a:p>
             <a:pPr>
-              <a:defRPr sz="1150">
+              <a:defRPr sz="1100">
                 <a:solidFill>
                   <a:srgbClr val="94A3B8"/>
                 </a:solidFill>
               </a:defRPr>
             </a:pPr>
             <a:r>
-              <a:t>In South Asian households, one smartphone is often shared to track health for elderly diabetic parents, growing children, and spouses. Single-user apps fail this need.</a:t>
+              <a:t>In South Asian households, one smartphone is often shared to track health for elderly diabetic parents, growing children, and spouses. Single-user apps fail this dynamic.</a:t>
             </a:r>
           </a:p>
         </p:txBody>
@@ -4928,8 +5665,8 @@
         </p:nvSpPr>
         <p:spPr>
           <a:xfrm>
-            <a:off x="731520" y="457200"/>
-            <a:ext cx="10698480" cy="365760"/>
+            <a:off x="731520" y="411480"/>
+            <a:ext cx="10698480" cy="320040"/>
           </a:xfrm>
           <a:prstGeom prst="rect">
             <a:avLst/>
@@ -4937,7 +5674,7 @@
           <a:noFill/>
         </p:spPr>
         <p:txBody>
-          <a:bodyPr wrap="square">
+          <a:bodyPr wrap="square" lIns="0" tIns="0" rIns="0" bIns="0">
             <a:spAutoFit/>
           </a:bodyPr>
           <a:lstStyle/>
@@ -4963,8 +5700,8 @@
         </p:nvSpPr>
         <p:spPr>
           <a:xfrm>
-            <a:off x="731520" y="777240"/>
-            <a:ext cx="10698480" cy="731520"/>
+            <a:off x="731520" y="731520"/>
+            <a:ext cx="10698480" cy="685800"/>
           </a:xfrm>
           <a:prstGeom prst="rect">
             <a:avLst/>
@@ -4972,13 +5709,13 @@
           <a:noFill/>
         </p:spPr>
         <p:txBody>
-          <a:bodyPr wrap="square">
+          <a:bodyPr wrap="square" lIns="0" tIns="0" rIns="0" bIns="0">
             <a:spAutoFit/>
           </a:bodyPr>
           <a:lstStyle/>
           <a:p>
             <a:pPr>
-              <a:defRPr sz="2600" b="1">
+              <a:defRPr sz="2400" b="1">
                 <a:solidFill>
                   <a:srgbClr val="F8FAFC"/>
                 </a:solidFill>
@@ -4998,8 +5735,8 @@
         </p:nvSpPr>
         <p:spPr>
           <a:xfrm>
-            <a:off x="731520" y="1645920"/>
-            <a:ext cx="3383280" cy="4389120"/>
+            <a:off x="731520" y="1600200"/>
+            <a:ext cx="3383280" cy="4663440"/>
           </a:xfrm>
           <a:prstGeom prst="roundRect">
             <a:avLst/>
@@ -5037,14 +5774,81 @@
       </p:sp>
       <p:sp>
         <p:nvSpPr>
-          <p:cNvPr id="6" name="TextBox 5"/>
+          <p:cNvPr id="6" name="Rounded Rectangle 5"/>
+          <p:cNvSpPr/>
+          <p:nvPr/>
+        </p:nvSpPr>
+        <p:spPr>
+          <a:xfrm>
+            <a:off x="932688" y="1764792"/>
+            <a:ext cx="475488" cy="475488"/>
+          </a:xfrm>
+          <a:prstGeom prst="roundRect">
+            <a:avLst/>
+          </a:prstGeom>
+          <a:solidFill>
+            <a:srgbClr val="123230"/>
+          </a:solidFill>
+          <a:ln>
+            <a:noFill/>
+          </a:ln>
+        </p:spPr>
+        <p:style>
+          <a:lnRef idx="1">
+            <a:schemeClr val="accent1"/>
+          </a:lnRef>
+          <a:fillRef idx="3">
+            <a:schemeClr val="accent1"/>
+          </a:fillRef>
+          <a:effectRef idx="2">
+            <a:schemeClr val="accent1"/>
+          </a:effectRef>
+          <a:fontRef idx="minor">
+            <a:schemeClr val="lt1"/>
+          </a:fontRef>
+        </p:style>
+        <p:txBody>
+          <a:bodyPr rtlCol="0" anchor="ctr"/>
+          <a:lstStyle/>
+          <a:p>
+            <a:pPr algn="ctr"/>
+          </a:p>
+        </p:txBody>
+      </p:sp>
+      <p:pic>
+        <p:nvPicPr>
+          <p:cNvPr id="7" name="Picture 6" descr="camera_emerald.png"/>
+          <p:cNvPicPr>
+            <a:picLocks noChangeAspect="1"/>
+          </p:cNvPicPr>
+          <p:nvPr/>
+        </p:nvPicPr>
+        <p:blipFill>
+          <a:blip r:embed="rId2"/>
+          <a:stretch>
+            <a:fillRect/>
+          </a:stretch>
+        </p:blipFill>
+        <p:spPr>
+          <a:xfrm>
+            <a:off x="987552" y="1819656"/>
+            <a:ext cx="365760" cy="365760"/>
+          </a:xfrm>
+          <a:prstGeom prst="rect">
+            <a:avLst/>
+          </a:prstGeom>
+        </p:spPr>
+      </p:pic>
+      <p:sp>
+        <p:nvSpPr>
+          <p:cNvPr id="8" name="TextBox 7"/>
           <p:cNvSpPr txBox="1"/>
           <p:nvPr/>
         </p:nvSpPr>
         <p:spPr>
           <a:xfrm>
-            <a:off x="868680" y="1783080"/>
-            <a:ext cx="3108960" cy="4114800"/>
+            <a:off x="932688" y="2331720"/>
+            <a:ext cx="2980944" cy="3794759"/>
           </a:xfrm>
           <a:prstGeom prst="rect">
             <a:avLst/>
@@ -5052,16 +5856,16 @@
           <a:noFill/>
         </p:spPr>
         <p:txBody>
-          <a:bodyPr wrap="square">
+          <a:bodyPr wrap="square" lIns="0" tIns="0" rIns="0" bIns="0">
             <a:spAutoFit/>
           </a:bodyPr>
           <a:lstStyle/>
           <a:p>
             <a:pPr>
               <a:spcAft>
-                <a:spcPts val="600"/>
+                <a:spcPts val="300"/>
               </a:spcAft>
-              <a:defRPr sz="1500" b="1">
+              <a:defRPr sz="1450" b="1">
                 <a:solidFill>
                   <a:srgbClr val="F8FAFC"/>
                 </a:solidFill>
@@ -5074,7 +5878,7 @@
           <a:p>
             <a:pPr>
               <a:spcAft>
-                <a:spcPts val="600"/>
+                <a:spcPts val="400"/>
               </a:spcAft>
               <a:defRPr sz="950" b="1">
                 <a:solidFill>
@@ -5088,7 +5892,7 @@
           </a:p>
           <a:p>
             <a:pPr>
-              <a:defRPr sz="1150">
+              <a:defRPr sz="1100">
                 <a:solidFill>
                   <a:srgbClr val="94A3B8"/>
                 </a:solidFill>
@@ -5115,14 +5919,14 @@
       </p:sp>
       <p:sp>
         <p:nvSpPr>
-          <p:cNvPr id="7" name="Rounded Rectangle 6"/>
+          <p:cNvPr id="9" name="Rounded Rectangle 8"/>
           <p:cNvSpPr/>
           <p:nvPr/>
         </p:nvSpPr>
         <p:spPr>
           <a:xfrm>
-            <a:off x="4389120" y="1645920"/>
-            <a:ext cx="3383280" cy="4389120"/>
+            <a:off x="4389120" y="1600200"/>
+            <a:ext cx="3383280" cy="4663440"/>
           </a:xfrm>
           <a:prstGeom prst="roundRect">
             <a:avLst/>
@@ -5160,14 +5964,81 @@
       </p:sp>
       <p:sp>
         <p:nvSpPr>
-          <p:cNvPr id="8" name="TextBox 7"/>
+          <p:cNvPr id="10" name="Rounded Rectangle 9"/>
+          <p:cNvSpPr/>
+          <p:nvPr/>
+        </p:nvSpPr>
+        <p:spPr>
+          <a:xfrm>
+            <a:off x="4590288" y="1764792"/>
+            <a:ext cx="475488" cy="475488"/>
+          </a:xfrm>
+          <a:prstGeom prst="roundRect">
+            <a:avLst/>
+          </a:prstGeom>
+          <a:solidFill>
+            <a:srgbClr val="3A1C20"/>
+          </a:solidFill>
+          <a:ln>
+            <a:noFill/>
+          </a:ln>
+        </p:spPr>
+        <p:style>
+          <a:lnRef idx="1">
+            <a:schemeClr val="accent1"/>
+          </a:lnRef>
+          <a:fillRef idx="3">
+            <a:schemeClr val="accent1"/>
+          </a:fillRef>
+          <a:effectRef idx="2">
+            <a:schemeClr val="accent1"/>
+          </a:effectRef>
+          <a:fontRef idx="minor">
+            <a:schemeClr val="lt1"/>
+          </a:fontRef>
+        </p:style>
+        <p:txBody>
+          <a:bodyPr rtlCol="0" anchor="ctr"/>
+          <a:lstStyle/>
+          <a:p>
+            <a:pPr algn="ctr"/>
+          </a:p>
+        </p:txBody>
+      </p:sp>
+      <p:pic>
+        <p:nvPicPr>
+          <p:cNvPr id="11" name="Picture 10" descr="stethoscope_coral.png"/>
+          <p:cNvPicPr>
+            <a:picLocks noChangeAspect="1"/>
+          </p:cNvPicPr>
+          <p:nvPr/>
+        </p:nvPicPr>
+        <p:blipFill>
+          <a:blip r:embed="rId3"/>
+          <a:stretch>
+            <a:fillRect/>
+          </a:stretch>
+        </p:blipFill>
+        <p:spPr>
+          <a:xfrm>
+            <a:off x="4645152" y="1819656"/>
+            <a:ext cx="365760" cy="365760"/>
+          </a:xfrm>
+          <a:prstGeom prst="rect">
+            <a:avLst/>
+          </a:prstGeom>
+        </p:spPr>
+      </p:pic>
+      <p:sp>
+        <p:nvSpPr>
+          <p:cNvPr id="12" name="TextBox 11"/>
           <p:cNvSpPr txBox="1"/>
           <p:nvPr/>
         </p:nvSpPr>
         <p:spPr>
           <a:xfrm>
-            <a:off x="4526280" y="1783080"/>
-            <a:ext cx="3108960" cy="4114800"/>
+            <a:off x="4590288" y="2331720"/>
+            <a:ext cx="2980944" cy="3794759"/>
           </a:xfrm>
           <a:prstGeom prst="rect">
             <a:avLst/>
@@ -5175,16 +6046,16 @@
           <a:noFill/>
         </p:spPr>
         <p:txBody>
-          <a:bodyPr wrap="square">
+          <a:bodyPr wrap="square" lIns="0" tIns="0" rIns="0" bIns="0">
             <a:spAutoFit/>
           </a:bodyPr>
           <a:lstStyle/>
           <a:p>
             <a:pPr>
               <a:spcAft>
-                <a:spcPts val="600"/>
+                <a:spcPts val="300"/>
               </a:spcAft>
-              <a:defRPr sz="1500" b="1">
+              <a:defRPr sz="1450" b="1">
                 <a:solidFill>
                   <a:srgbClr val="F8FAFC"/>
                 </a:solidFill>
@@ -5197,7 +6068,7 @@
           <a:p>
             <a:pPr>
               <a:spcAft>
-                <a:spcPts val="600"/>
+                <a:spcPts val="400"/>
               </a:spcAft>
               <a:defRPr sz="950" b="1">
                 <a:solidFill>
@@ -5211,7 +6082,7 @@
           </a:p>
           <a:p>
             <a:pPr>
-              <a:defRPr sz="1150">
+              <a:defRPr sz="1100">
                 <a:solidFill>
                   <a:srgbClr val="94A3B8"/>
                 </a:solidFill>
@@ -5242,14 +6113,14 @@
       </p:sp>
       <p:sp>
         <p:nvSpPr>
-          <p:cNvPr id="9" name="Rounded Rectangle 8"/>
+          <p:cNvPr id="13" name="Rounded Rectangle 12"/>
           <p:cNvSpPr/>
           <p:nvPr/>
         </p:nvSpPr>
         <p:spPr>
           <a:xfrm>
-            <a:off x="8046720" y="1645920"/>
-            <a:ext cx="3383280" cy="4389120"/>
+            <a:off x="8046720" y="1600200"/>
+            <a:ext cx="3383280" cy="4663440"/>
           </a:xfrm>
           <a:prstGeom prst="roundRect">
             <a:avLst/>
@@ -5287,14 +6158,81 @@
       </p:sp>
       <p:sp>
         <p:nvSpPr>
-          <p:cNvPr id="10" name="TextBox 9"/>
+          <p:cNvPr id="14" name="Rounded Rectangle 13"/>
+          <p:cNvSpPr/>
+          <p:nvPr/>
+        </p:nvSpPr>
+        <p:spPr>
+          <a:xfrm>
+            <a:off x="8247888" y="1764792"/>
+            <a:ext cx="475488" cy="475488"/>
+          </a:xfrm>
+          <a:prstGeom prst="roundRect">
+            <a:avLst/>
+          </a:prstGeom>
+          <a:solidFill>
+            <a:srgbClr val="103040"/>
+          </a:solidFill>
+          <a:ln>
+            <a:noFill/>
+          </a:ln>
+        </p:spPr>
+        <p:style>
+          <a:lnRef idx="1">
+            <a:schemeClr val="accent1"/>
+          </a:lnRef>
+          <a:fillRef idx="3">
+            <a:schemeClr val="accent1"/>
+          </a:fillRef>
+          <a:effectRef idx="2">
+            <a:schemeClr val="accent1"/>
+          </a:effectRef>
+          <a:fontRef idx="minor">
+            <a:schemeClr val="lt1"/>
+          </a:fontRef>
+        </p:style>
+        <p:txBody>
+          <a:bodyPr rtlCol="0" anchor="ctr"/>
+          <a:lstStyle/>
+          <a:p>
+            <a:pPr algn="ctr"/>
+          </a:p>
+        </p:txBody>
+      </p:sp>
+      <p:pic>
+        <p:nvPicPr>
+          <p:cNvPr id="15" name="Picture 14" descr="users_cyan.png"/>
+          <p:cNvPicPr>
+            <a:picLocks noChangeAspect="1"/>
+          </p:cNvPicPr>
+          <p:nvPr/>
+        </p:nvPicPr>
+        <p:blipFill>
+          <a:blip r:embed="rId4"/>
+          <a:stretch>
+            <a:fillRect/>
+          </a:stretch>
+        </p:blipFill>
+        <p:spPr>
+          <a:xfrm>
+            <a:off x="8302752" y="1819656"/>
+            <a:ext cx="365760" cy="365760"/>
+          </a:xfrm>
+          <a:prstGeom prst="rect">
+            <a:avLst/>
+          </a:prstGeom>
+        </p:spPr>
+      </p:pic>
+      <p:sp>
+        <p:nvSpPr>
+          <p:cNvPr id="16" name="TextBox 15"/>
           <p:cNvSpPr txBox="1"/>
           <p:nvPr/>
         </p:nvSpPr>
         <p:spPr>
           <a:xfrm>
-            <a:off x="8183880" y="1783080"/>
-            <a:ext cx="3108960" cy="4114800"/>
+            <a:off x="8247888" y="2331720"/>
+            <a:ext cx="2980944" cy="3794759"/>
           </a:xfrm>
           <a:prstGeom prst="rect">
             <a:avLst/>
@@ -5302,16 +6240,16 @@
           <a:noFill/>
         </p:spPr>
         <p:txBody>
-          <a:bodyPr wrap="square">
+          <a:bodyPr wrap="square" lIns="0" tIns="0" rIns="0" bIns="0">
             <a:spAutoFit/>
           </a:bodyPr>
           <a:lstStyle/>
           <a:p>
             <a:pPr>
               <a:spcAft>
-                <a:spcPts val="600"/>
+                <a:spcPts val="300"/>
               </a:spcAft>
-              <a:defRPr sz="1500" b="1">
+              <a:defRPr sz="1450" b="1">
                 <a:solidFill>
                   <a:srgbClr val="F8FAFC"/>
                 </a:solidFill>
@@ -5324,7 +6262,7 @@
           <a:p>
             <a:pPr>
               <a:spcAft>
-                <a:spcPts val="600"/>
+                <a:spcPts val="400"/>
               </a:spcAft>
               <a:defRPr sz="950" b="1">
                 <a:solidFill>
@@ -5338,7 +6276,7 @@
           </a:p>
           <a:p>
             <a:pPr>
-              <a:defRPr sz="1150">
+              <a:defRPr sz="1100">
                 <a:solidFill>
                   <a:srgbClr val="94A3B8"/>
                 </a:solidFill>
@@ -5436,8 +6374,8 @@
         </p:nvSpPr>
         <p:spPr>
           <a:xfrm>
-            <a:off x="731520" y="457200"/>
-            <a:ext cx="10698480" cy="365760"/>
+            <a:off x="731520" y="411480"/>
+            <a:ext cx="10698480" cy="320040"/>
           </a:xfrm>
           <a:prstGeom prst="rect">
             <a:avLst/>
@@ -5445,7 +6383,7 @@
           <a:noFill/>
         </p:spPr>
         <p:txBody>
-          <a:bodyPr wrap="square">
+          <a:bodyPr wrap="square" lIns="0" tIns="0" rIns="0" bIns="0">
             <a:spAutoFit/>
           </a:bodyPr>
           <a:lstStyle/>
@@ -5471,8 +6409,8 @@
         </p:nvSpPr>
         <p:spPr>
           <a:xfrm>
-            <a:off x="731520" y="777240"/>
-            <a:ext cx="10698480" cy="731520"/>
+            <a:off x="731520" y="731520"/>
+            <a:ext cx="10698480" cy="685800"/>
           </a:xfrm>
           <a:prstGeom prst="rect">
             <a:avLst/>
@@ -5480,13 +6418,13 @@
           <a:noFill/>
         </p:spPr>
         <p:txBody>
-          <a:bodyPr wrap="square">
+          <a:bodyPr wrap="square" lIns="0" tIns="0" rIns="0" bIns="0">
             <a:spAutoFit/>
           </a:bodyPr>
           <a:lstStyle/>
           <a:p>
             <a:pPr>
-              <a:defRPr sz="2600" b="1">
+              <a:defRPr sz="2400" b="1">
                 <a:solidFill>
                   <a:srgbClr val="F8FAFC"/>
                 </a:solidFill>
@@ -5506,8 +6444,8 @@
         </p:nvSpPr>
         <p:spPr>
           <a:xfrm>
-            <a:off x="731520" y="1645920"/>
-            <a:ext cx="5212080" cy="2194560"/>
+            <a:off x="731520" y="1600200"/>
+            <a:ext cx="5212080" cy="2286000"/>
           </a:xfrm>
           <a:prstGeom prst="roundRect">
             <a:avLst/>
@@ -5545,14 +6483,81 @@
       </p:sp>
       <p:sp>
         <p:nvSpPr>
-          <p:cNvPr id="6" name="TextBox 5"/>
+          <p:cNvPr id="6" name="Rounded Rectangle 5"/>
+          <p:cNvSpPr/>
+          <p:nvPr/>
+        </p:nvSpPr>
+        <p:spPr>
+          <a:xfrm>
+            <a:off x="932688" y="1764792"/>
+            <a:ext cx="438912" cy="438912"/>
+          </a:xfrm>
+          <a:prstGeom prst="roundRect">
+            <a:avLst/>
+          </a:prstGeom>
+          <a:solidFill>
+            <a:srgbClr val="382C14"/>
+          </a:solidFill>
+          <a:ln>
+            <a:noFill/>
+          </a:ln>
+        </p:spPr>
+        <p:style>
+          <a:lnRef idx="1">
+            <a:schemeClr val="accent1"/>
+          </a:lnRef>
+          <a:fillRef idx="3">
+            <a:schemeClr val="accent1"/>
+          </a:fillRef>
+          <a:effectRef idx="2">
+            <a:schemeClr val="accent1"/>
+          </a:effectRef>
+          <a:fontRef idx="minor">
+            <a:schemeClr val="lt1"/>
+          </a:fontRef>
+        </p:style>
+        <p:txBody>
+          <a:bodyPr rtlCol="0" anchor="ctr"/>
+          <a:lstStyle/>
+          <a:p>
+            <a:pPr algn="ctr"/>
+          </a:p>
+        </p:txBody>
+      </p:sp>
+      <p:pic>
+        <p:nvPicPr>
+          <p:cNvPr id="7" name="Picture 6" descr="food_amber.png"/>
+          <p:cNvPicPr>
+            <a:picLocks noChangeAspect="1"/>
+          </p:cNvPicPr>
+          <p:nvPr/>
+        </p:nvPicPr>
+        <p:blipFill>
+          <a:blip r:embed="rId2"/>
+          <a:stretch>
+            <a:fillRect/>
+          </a:stretch>
+        </p:blipFill>
+        <p:spPr>
+          <a:xfrm>
+            <a:off x="987552" y="1819656"/>
+            <a:ext cx="329184" cy="329184"/>
+          </a:xfrm>
+          <a:prstGeom prst="rect">
+            <a:avLst/>
+          </a:prstGeom>
+        </p:spPr>
+      </p:pic>
+      <p:sp>
+        <p:nvSpPr>
+          <p:cNvPr id="8" name="TextBox 7"/>
           <p:cNvSpPr txBox="1"/>
           <p:nvPr/>
         </p:nvSpPr>
         <p:spPr>
           <a:xfrm>
-            <a:off x="868680" y="1783080"/>
-            <a:ext cx="4937760" cy="1920240"/>
+            <a:off x="1463040" y="1764792"/>
+            <a:ext cx="4297680" cy="1984248"/>
           </a:xfrm>
           <a:prstGeom prst="rect">
             <a:avLst/>
@@ -5560,16 +6565,16 @@
           <a:noFill/>
         </p:spPr>
         <p:txBody>
-          <a:bodyPr wrap="square">
+          <a:bodyPr wrap="square" lIns="0" tIns="0" rIns="0" bIns="0">
             <a:spAutoFit/>
           </a:bodyPr>
           <a:lstStyle/>
           <a:p>
             <a:pPr>
               <a:spcAft>
-                <a:spcPts val="600"/>
+                <a:spcPts val="300"/>
               </a:spcAft>
-              <a:defRPr sz="1500" b="1">
+              <a:defRPr sz="1450" b="1">
                 <a:solidFill>
                   <a:srgbClr val="F8FAFC"/>
                 </a:solidFill>
@@ -5582,7 +6587,7 @@
           <a:p>
             <a:pPr>
               <a:spcAft>
-                <a:spcPts val="600"/>
+                <a:spcPts val="400"/>
               </a:spcAft>
               <a:defRPr sz="950" b="1">
                 <a:solidFill>
@@ -5596,7 +6601,7 @@
           </a:p>
           <a:p>
             <a:pPr>
-              <a:defRPr sz="1150">
+              <a:defRPr sz="1100">
                 <a:solidFill>
                   <a:srgbClr val="94A3B8"/>
                 </a:solidFill>
@@ -5610,14 +6615,14 @@
       </p:sp>
       <p:sp>
         <p:nvSpPr>
-          <p:cNvPr id="7" name="Rounded Rectangle 6"/>
+          <p:cNvPr id="9" name="Rounded Rectangle 8"/>
           <p:cNvSpPr/>
           <p:nvPr/>
         </p:nvSpPr>
         <p:spPr>
           <a:xfrm>
-            <a:off x="6217920" y="1645920"/>
-            <a:ext cx="5212080" cy="2194560"/>
+            <a:off x="6217920" y="1600200"/>
+            <a:ext cx="5212080" cy="2286000"/>
           </a:xfrm>
           <a:prstGeom prst="roundRect">
             <a:avLst/>
@@ -5655,14 +6660,81 @@
       </p:sp>
       <p:sp>
         <p:nvSpPr>
-          <p:cNvPr id="8" name="TextBox 7"/>
+          <p:cNvPr id="10" name="Rounded Rectangle 9"/>
+          <p:cNvSpPr/>
+          <p:nvPr/>
+        </p:nvSpPr>
+        <p:spPr>
+          <a:xfrm>
+            <a:off x="6419088" y="1764792"/>
+            <a:ext cx="438912" cy="438912"/>
+          </a:xfrm>
+          <a:prstGeom prst="roundRect">
+            <a:avLst/>
+          </a:prstGeom>
+          <a:solidFill>
+            <a:srgbClr val="103040"/>
+          </a:solidFill>
+          <a:ln>
+            <a:noFill/>
+          </a:ln>
+        </p:spPr>
+        <p:style>
+          <a:lnRef idx="1">
+            <a:schemeClr val="accent1"/>
+          </a:lnRef>
+          <a:fillRef idx="3">
+            <a:schemeClr val="accent1"/>
+          </a:fillRef>
+          <a:effectRef idx="2">
+            <a:schemeClr val="accent1"/>
+          </a:effectRef>
+          <a:fontRef idx="minor">
+            <a:schemeClr val="lt1"/>
+          </a:fontRef>
+        </p:style>
+        <p:txBody>
+          <a:bodyPr rtlCol="0" anchor="ctr"/>
+          <a:lstStyle/>
+          <a:p>
+            <a:pPr algn="ctr"/>
+          </a:p>
+        </p:txBody>
+      </p:sp>
+      <p:pic>
+        <p:nvPicPr>
+          <p:cNvPr id="11" name="Picture 10" descr="sliders_cyan.png"/>
+          <p:cNvPicPr>
+            <a:picLocks noChangeAspect="1"/>
+          </p:cNvPicPr>
+          <p:nvPr/>
+        </p:nvPicPr>
+        <p:blipFill>
+          <a:blip r:embed="rId3"/>
+          <a:stretch>
+            <a:fillRect/>
+          </a:stretch>
+        </p:blipFill>
+        <p:spPr>
+          <a:xfrm>
+            <a:off x="6473952" y="1819656"/>
+            <a:ext cx="329184" cy="329184"/>
+          </a:xfrm>
+          <a:prstGeom prst="rect">
+            <a:avLst/>
+          </a:prstGeom>
+        </p:spPr>
+      </p:pic>
+      <p:sp>
+        <p:nvSpPr>
+          <p:cNvPr id="12" name="TextBox 11"/>
           <p:cNvSpPr txBox="1"/>
           <p:nvPr/>
         </p:nvSpPr>
         <p:spPr>
           <a:xfrm>
-            <a:off x="6355080" y="1783080"/>
-            <a:ext cx="4937760" cy="1920240"/>
+            <a:off x="6949440" y="1764792"/>
+            <a:ext cx="4297680" cy="1984248"/>
           </a:xfrm>
           <a:prstGeom prst="rect">
             <a:avLst/>
@@ -5670,16 +6742,16 @@
           <a:noFill/>
         </p:spPr>
         <p:txBody>
-          <a:bodyPr wrap="square">
+          <a:bodyPr wrap="square" lIns="0" tIns="0" rIns="0" bIns="0">
             <a:spAutoFit/>
           </a:bodyPr>
           <a:lstStyle/>
           <a:p>
             <a:pPr>
               <a:spcAft>
-                <a:spcPts val="600"/>
+                <a:spcPts val="300"/>
               </a:spcAft>
-              <a:defRPr sz="1500" b="1">
+              <a:defRPr sz="1450" b="1">
                 <a:solidFill>
                   <a:srgbClr val="F8FAFC"/>
                 </a:solidFill>
@@ -5692,7 +6764,7 @@
           <a:p>
             <a:pPr>
               <a:spcAft>
-                <a:spcPts val="600"/>
+                <a:spcPts val="400"/>
               </a:spcAft>
               <a:defRPr sz="950" b="1">
                 <a:solidFill>
@@ -5706,7 +6778,7 @@
           </a:p>
           <a:p>
             <a:pPr>
-              <a:defRPr sz="1150">
+              <a:defRPr sz="1100">
                 <a:solidFill>
                   <a:srgbClr val="94A3B8"/>
                 </a:solidFill>
@@ -5720,14 +6792,14 @@
       </p:sp>
       <p:sp>
         <p:nvSpPr>
-          <p:cNvPr id="9" name="Rounded Rectangle 8"/>
+          <p:cNvPr id="13" name="Rounded Rectangle 12"/>
           <p:cNvSpPr/>
           <p:nvPr/>
         </p:nvSpPr>
         <p:spPr>
           <a:xfrm>
             <a:off x="731520" y="4114800"/>
-            <a:ext cx="5212080" cy="2194560"/>
+            <a:ext cx="5212080" cy="2286000"/>
           </a:xfrm>
           <a:prstGeom prst="roundRect">
             <a:avLst/>
@@ -5765,14 +6837,81 @@
       </p:sp>
       <p:sp>
         <p:nvSpPr>
-          <p:cNvPr id="10" name="TextBox 9"/>
+          <p:cNvPr id="14" name="Rounded Rectangle 13"/>
+          <p:cNvSpPr/>
+          <p:nvPr/>
+        </p:nvSpPr>
+        <p:spPr>
+          <a:xfrm>
+            <a:off x="932688" y="4279392"/>
+            <a:ext cx="438912" cy="438912"/>
+          </a:xfrm>
+          <a:prstGeom prst="roundRect">
+            <a:avLst/>
+          </a:prstGeom>
+          <a:solidFill>
+            <a:srgbClr val="382C14"/>
+          </a:solidFill>
+          <a:ln>
+            <a:noFill/>
+          </a:ln>
+        </p:spPr>
+        <p:style>
+          <a:lnRef idx="1">
+            <a:schemeClr val="accent1"/>
+          </a:lnRef>
+          <a:fillRef idx="3">
+            <a:schemeClr val="accent1"/>
+          </a:fillRef>
+          <a:effectRef idx="2">
+            <a:schemeClr val="accent1"/>
+          </a:effectRef>
+          <a:fontRef idx="minor">
+            <a:schemeClr val="lt1"/>
+          </a:fontRef>
+        </p:style>
+        <p:txBody>
+          <a:bodyPr rtlCol="0" anchor="ctr"/>
+          <a:lstStyle/>
+          <a:p>
+            <a:pPr algn="ctr"/>
+          </a:p>
+        </p:txBody>
+      </p:sp>
+      <p:pic>
+        <p:nvPicPr>
+          <p:cNvPr id="15" name="Picture 14" descr="barcode_amber.png"/>
+          <p:cNvPicPr>
+            <a:picLocks noChangeAspect="1"/>
+          </p:cNvPicPr>
+          <p:nvPr/>
+        </p:nvPicPr>
+        <p:blipFill>
+          <a:blip r:embed="rId4"/>
+          <a:stretch>
+            <a:fillRect/>
+          </a:stretch>
+        </p:blipFill>
+        <p:spPr>
+          <a:xfrm>
+            <a:off x="987552" y="4334256"/>
+            <a:ext cx="329184" cy="329184"/>
+          </a:xfrm>
+          <a:prstGeom prst="rect">
+            <a:avLst/>
+          </a:prstGeom>
+        </p:spPr>
+      </p:pic>
+      <p:sp>
+        <p:nvSpPr>
+          <p:cNvPr id="16" name="TextBox 15"/>
           <p:cNvSpPr txBox="1"/>
           <p:nvPr/>
         </p:nvSpPr>
         <p:spPr>
           <a:xfrm>
-            <a:off x="868680" y="4251960"/>
-            <a:ext cx="4937760" cy="1920240"/>
+            <a:off x="1463040" y="4279392"/>
+            <a:ext cx="4297680" cy="1984248"/>
           </a:xfrm>
           <a:prstGeom prst="rect">
             <a:avLst/>
@@ -5780,16 +6919,16 @@
           <a:noFill/>
         </p:spPr>
         <p:txBody>
-          <a:bodyPr wrap="square">
+          <a:bodyPr wrap="square" lIns="0" tIns="0" rIns="0" bIns="0">
             <a:spAutoFit/>
           </a:bodyPr>
           <a:lstStyle/>
           <a:p>
             <a:pPr>
               <a:spcAft>
-                <a:spcPts val="600"/>
+                <a:spcPts val="300"/>
               </a:spcAft>
-              <a:defRPr sz="1500" b="1">
+              <a:defRPr sz="1450" b="1">
                 <a:solidFill>
                   <a:srgbClr val="F8FAFC"/>
                 </a:solidFill>
@@ -5802,7 +6941,7 @@
           <a:p>
             <a:pPr>
               <a:spcAft>
-                <a:spcPts val="600"/>
+                <a:spcPts val="400"/>
               </a:spcAft>
               <a:defRPr sz="950" b="1">
                 <a:solidFill>
@@ -5816,7 +6955,7 @@
           </a:p>
           <a:p>
             <a:pPr>
-              <a:defRPr sz="1150">
+              <a:defRPr sz="1100">
                 <a:solidFill>
                   <a:srgbClr val="94A3B8"/>
                 </a:solidFill>
@@ -5830,14 +6969,14 @@
       </p:sp>
       <p:sp>
         <p:nvSpPr>
-          <p:cNvPr id="11" name="Rounded Rectangle 10"/>
+          <p:cNvPr id="17" name="Rounded Rectangle 16"/>
           <p:cNvSpPr/>
           <p:nvPr/>
         </p:nvSpPr>
         <p:spPr>
           <a:xfrm>
             <a:off x="6217920" y="4114800"/>
-            <a:ext cx="5212080" cy="2194560"/>
+            <a:ext cx="5212080" cy="2286000"/>
           </a:xfrm>
           <a:prstGeom prst="roundRect">
             <a:avLst/>
@@ -5875,14 +7014,81 @@
       </p:sp>
       <p:sp>
         <p:nvSpPr>
-          <p:cNvPr id="12" name="TextBox 11"/>
+          <p:cNvPr id="18" name="Rounded Rectangle 17"/>
+          <p:cNvSpPr/>
+          <p:nvPr/>
+        </p:nvSpPr>
+        <p:spPr>
+          <a:xfrm>
+            <a:off x="6419088" y="4279392"/>
+            <a:ext cx="438912" cy="438912"/>
+          </a:xfrm>
+          <a:prstGeom prst="roundRect">
+            <a:avLst/>
+          </a:prstGeom>
+          <a:solidFill>
+            <a:srgbClr val="123230"/>
+          </a:solidFill>
+          <a:ln>
+            <a:noFill/>
+          </a:ln>
+        </p:spPr>
+        <p:style>
+          <a:lnRef idx="1">
+            <a:schemeClr val="accent1"/>
+          </a:lnRef>
+          <a:fillRef idx="3">
+            <a:schemeClr val="accent1"/>
+          </a:fillRef>
+          <a:effectRef idx="2">
+            <a:schemeClr val="accent1"/>
+          </a:effectRef>
+          <a:fontRef idx="minor">
+            <a:schemeClr val="lt1"/>
+          </a:fontRef>
+        </p:style>
+        <p:txBody>
+          <a:bodyPr rtlCol="0" anchor="ctr"/>
+          <a:lstStyle/>
+          <a:p>
+            <a:pPr algn="ctr"/>
+          </a:p>
+        </p:txBody>
+      </p:sp>
+      <p:pic>
+        <p:nvPicPr>
+          <p:cNvPr id="19" name="Picture 18" descr="chat_emerald.png"/>
+          <p:cNvPicPr>
+            <a:picLocks noChangeAspect="1"/>
+          </p:cNvPicPr>
+          <p:nvPr/>
+        </p:nvPicPr>
+        <p:blipFill>
+          <a:blip r:embed="rId5"/>
+          <a:stretch>
+            <a:fillRect/>
+          </a:stretch>
+        </p:blipFill>
+        <p:spPr>
+          <a:xfrm>
+            <a:off x="6473952" y="4334256"/>
+            <a:ext cx="329184" cy="329184"/>
+          </a:xfrm>
+          <a:prstGeom prst="rect">
+            <a:avLst/>
+          </a:prstGeom>
+        </p:spPr>
+      </p:pic>
+      <p:sp>
+        <p:nvSpPr>
+          <p:cNvPr id="20" name="TextBox 19"/>
           <p:cNvSpPr txBox="1"/>
           <p:nvPr/>
         </p:nvSpPr>
         <p:spPr>
           <a:xfrm>
-            <a:off x="6355080" y="4251960"/>
-            <a:ext cx="4937760" cy="1920240"/>
+            <a:off x="6949440" y="4279392"/>
+            <a:ext cx="4297680" cy="1984248"/>
           </a:xfrm>
           <a:prstGeom prst="rect">
             <a:avLst/>
@@ -5890,16 +7096,16 @@
           <a:noFill/>
         </p:spPr>
         <p:txBody>
-          <a:bodyPr wrap="square">
+          <a:bodyPr wrap="square" lIns="0" tIns="0" rIns="0" bIns="0">
             <a:spAutoFit/>
           </a:bodyPr>
           <a:lstStyle/>
           <a:p>
             <a:pPr>
               <a:spcAft>
-                <a:spcPts val="600"/>
+                <a:spcPts val="300"/>
               </a:spcAft>
-              <a:defRPr sz="1500" b="1">
+              <a:defRPr sz="1450" b="1">
                 <a:solidFill>
                   <a:srgbClr val="F8FAFC"/>
                 </a:solidFill>
@@ -5912,7 +7118,7 @@
           <a:p>
             <a:pPr>
               <a:spcAft>
-                <a:spcPts val="600"/>
+                <a:spcPts val="400"/>
               </a:spcAft>
               <a:defRPr sz="950" b="1">
                 <a:solidFill>
@@ -5926,7 +7132,7 @@
           </a:p>
           <a:p>
             <a:pPr>
-              <a:defRPr sz="1150">
+              <a:defRPr sz="1100">
                 <a:solidFill>
                   <a:srgbClr val="94A3B8"/>
                 </a:solidFill>
@@ -6007,8 +7213,8 @@
         </p:nvSpPr>
         <p:spPr>
           <a:xfrm>
-            <a:off x="731520" y="457200"/>
-            <a:ext cx="10698480" cy="365760"/>
+            <a:off x="731520" y="411480"/>
+            <a:ext cx="10698480" cy="320040"/>
           </a:xfrm>
           <a:prstGeom prst="rect">
             <a:avLst/>
@@ -6016,7 +7222,7 @@
           <a:noFill/>
         </p:spPr>
         <p:txBody>
-          <a:bodyPr wrap="square">
+          <a:bodyPr wrap="square" lIns="0" tIns="0" rIns="0" bIns="0">
             <a:spAutoFit/>
           </a:bodyPr>
           <a:lstStyle/>
@@ -6042,8 +7248,8 @@
         </p:nvSpPr>
         <p:spPr>
           <a:xfrm>
-            <a:off x="731520" y="777240"/>
-            <a:ext cx="10698480" cy="731520"/>
+            <a:off x="731520" y="731520"/>
+            <a:ext cx="10698480" cy="685800"/>
           </a:xfrm>
           <a:prstGeom prst="rect">
             <a:avLst/>
@@ -6051,13 +7257,13 @@
           <a:noFill/>
         </p:spPr>
         <p:txBody>
-          <a:bodyPr wrap="square">
+          <a:bodyPr wrap="square" lIns="0" tIns="0" rIns="0" bIns="0">
             <a:spAutoFit/>
           </a:bodyPr>
           <a:lstStyle/>
           <a:p>
             <a:pPr>
-              <a:defRPr sz="2600" b="1">
+              <a:defRPr sz="2400" b="1">
                 <a:solidFill>
                   <a:srgbClr val="F8FAFC"/>
                 </a:solidFill>
@@ -6077,8 +7283,8 @@
         </p:nvSpPr>
         <p:spPr>
           <a:xfrm>
-            <a:off x="731520" y="1645920"/>
-            <a:ext cx="10698480" cy="1371600"/>
+            <a:off x="731520" y="1600200"/>
+            <a:ext cx="10698480" cy="1280160"/>
           </a:xfrm>
           <a:prstGeom prst="roundRect">
             <a:avLst/>
@@ -6122,8 +7328,8 @@
         </p:nvSpPr>
         <p:spPr>
           <a:xfrm>
-            <a:off x="914400" y="1737360"/>
-            <a:ext cx="10332720" cy="1188720"/>
+            <a:off x="914400" y="1691640"/>
+            <a:ext cx="10332720" cy="1097280"/>
           </a:xfrm>
           <a:prstGeom prst="rect">
             <a:avLst/>
@@ -6172,8 +7378,8 @@
         </p:nvSpPr>
         <p:spPr>
           <a:xfrm>
-            <a:off x="731520" y="3291840"/>
-            <a:ext cx="5212080" cy="2926080"/>
+            <a:off x="731520" y="3108960"/>
+            <a:ext cx="5212080" cy="3108960"/>
           </a:xfrm>
           <a:prstGeom prst="roundRect">
             <a:avLst/>
@@ -6211,14 +7417,81 @@
       </p:sp>
       <p:sp>
         <p:nvSpPr>
-          <p:cNvPr id="8" name="TextBox 7"/>
+          <p:cNvPr id="8" name="Rounded Rectangle 7"/>
+          <p:cNvSpPr/>
+          <p:nvPr/>
+        </p:nvSpPr>
+        <p:spPr>
+          <a:xfrm>
+            <a:off x="932688" y="3273552"/>
+            <a:ext cx="438912" cy="438912"/>
+          </a:xfrm>
+          <a:prstGeom prst="roundRect">
+            <a:avLst/>
+          </a:prstGeom>
+          <a:solidFill>
+            <a:srgbClr val="3A1C20"/>
+          </a:solidFill>
+          <a:ln>
+            <a:noFill/>
+          </a:ln>
+        </p:spPr>
+        <p:style>
+          <a:lnRef idx="1">
+            <a:schemeClr val="accent1"/>
+          </a:lnRef>
+          <a:fillRef idx="3">
+            <a:schemeClr val="accent1"/>
+          </a:fillRef>
+          <a:effectRef idx="2">
+            <a:schemeClr val="accent1"/>
+          </a:effectRef>
+          <a:fontRef idx="minor">
+            <a:schemeClr val="lt1"/>
+          </a:fontRef>
+        </p:style>
+        <p:txBody>
+          <a:bodyPr rtlCol="0" anchor="ctr"/>
+          <a:lstStyle/>
+          <a:p>
+            <a:pPr algn="ctr"/>
+          </a:p>
+        </p:txBody>
+      </p:sp>
+      <p:pic>
+        <p:nvPicPr>
+          <p:cNvPr id="9" name="Picture 8" descr="zap_coral.png"/>
+          <p:cNvPicPr>
+            <a:picLocks noChangeAspect="1"/>
+          </p:cNvPicPr>
+          <p:nvPr/>
+        </p:nvPicPr>
+        <p:blipFill>
+          <a:blip r:embed="rId2"/>
+          <a:stretch>
+            <a:fillRect/>
+          </a:stretch>
+        </p:blipFill>
+        <p:spPr>
+          <a:xfrm>
+            <a:off x="987552" y="3328415"/>
+            <a:ext cx="329184" cy="329184"/>
+          </a:xfrm>
+          <a:prstGeom prst="rect">
+            <a:avLst/>
+          </a:prstGeom>
+        </p:spPr>
+      </p:pic>
+      <p:sp>
+        <p:nvSpPr>
+          <p:cNvPr id="10" name="TextBox 9"/>
           <p:cNvSpPr txBox="1"/>
           <p:nvPr/>
         </p:nvSpPr>
         <p:spPr>
           <a:xfrm>
-            <a:off x="868680" y="3429000"/>
-            <a:ext cx="4937760" cy="2651760"/>
+            <a:off x="1463040" y="3273552"/>
+            <a:ext cx="4297680" cy="2807208"/>
           </a:xfrm>
           <a:prstGeom prst="rect">
             <a:avLst/>
@@ -6226,16 +7499,16 @@
           <a:noFill/>
         </p:spPr>
         <p:txBody>
-          <a:bodyPr wrap="square">
+          <a:bodyPr wrap="square" lIns="0" tIns="0" rIns="0" bIns="0">
             <a:spAutoFit/>
           </a:bodyPr>
           <a:lstStyle/>
           <a:p>
             <a:pPr>
               <a:spcAft>
-                <a:spcPts val="600"/>
+                <a:spcPts val="300"/>
               </a:spcAft>
-              <a:defRPr sz="1500" b="1">
+              <a:defRPr sz="1450" b="1">
                 <a:solidFill>
                   <a:srgbClr val="F8FAFC"/>
                 </a:solidFill>
@@ -6248,7 +7521,7 @@
           <a:p>
             <a:pPr>
               <a:spcAft>
-                <a:spcPts val="600"/>
+                <a:spcPts val="400"/>
               </a:spcAft>
               <a:defRPr sz="950" b="1">
                 <a:solidFill>
@@ -6262,7 +7535,7 @@
           </a:p>
           <a:p>
             <a:pPr>
-              <a:defRPr sz="1150">
+              <a:defRPr sz="1100">
                 <a:solidFill>
                   <a:srgbClr val="94A3B8"/>
                 </a:solidFill>
@@ -6276,14 +7549,14 @@
       </p:sp>
       <p:sp>
         <p:nvSpPr>
-          <p:cNvPr id="9" name="Rounded Rectangle 8"/>
+          <p:cNvPr id="11" name="Rounded Rectangle 10"/>
           <p:cNvSpPr/>
           <p:nvPr/>
         </p:nvSpPr>
         <p:spPr>
           <a:xfrm>
-            <a:off x="6217920" y="3291840"/>
-            <a:ext cx="5212080" cy="2926080"/>
+            <a:off x="6217920" y="3108960"/>
+            <a:ext cx="5212080" cy="3108960"/>
           </a:xfrm>
           <a:prstGeom prst="roundRect">
             <a:avLst/>
@@ -6321,14 +7594,81 @@
       </p:sp>
       <p:sp>
         <p:nvSpPr>
-          <p:cNvPr id="10" name="TextBox 9"/>
+          <p:cNvPr id="12" name="Rounded Rectangle 11"/>
+          <p:cNvSpPr/>
+          <p:nvPr/>
+        </p:nvSpPr>
+        <p:spPr>
+          <a:xfrm>
+            <a:off x="6419088" y="3273552"/>
+            <a:ext cx="438912" cy="438912"/>
+          </a:xfrm>
+          <a:prstGeom prst="roundRect">
+            <a:avLst/>
+          </a:prstGeom>
+          <a:solidFill>
+            <a:srgbClr val="123230"/>
+          </a:solidFill>
+          <a:ln>
+            <a:noFill/>
+          </a:ln>
+        </p:spPr>
+        <p:style>
+          <a:lnRef idx="1">
+            <a:schemeClr val="accent1"/>
+          </a:lnRef>
+          <a:fillRef idx="3">
+            <a:schemeClr val="accent1"/>
+          </a:fillRef>
+          <a:effectRef idx="2">
+            <a:schemeClr val="accent1"/>
+          </a:effectRef>
+          <a:fontRef idx="minor">
+            <a:schemeClr val="lt1"/>
+          </a:fontRef>
+        </p:style>
+        <p:txBody>
+          <a:bodyPr rtlCol="0" anchor="ctr"/>
+          <a:lstStyle/>
+          <a:p>
+            <a:pPr algn="ctr"/>
+          </a:p>
+        </p:txBody>
+      </p:sp>
+      <p:pic>
+        <p:nvPicPr>
+          <p:cNvPr id="13" name="Picture 12" descr="mappin_emerald.png"/>
+          <p:cNvPicPr>
+            <a:picLocks noChangeAspect="1"/>
+          </p:cNvPicPr>
+          <p:nvPr/>
+        </p:nvPicPr>
+        <p:blipFill>
+          <a:blip r:embed="rId3"/>
+          <a:stretch>
+            <a:fillRect/>
+          </a:stretch>
+        </p:blipFill>
+        <p:spPr>
+          <a:xfrm>
+            <a:off x="6473952" y="3328415"/>
+            <a:ext cx="329184" cy="329184"/>
+          </a:xfrm>
+          <a:prstGeom prst="rect">
+            <a:avLst/>
+          </a:prstGeom>
+        </p:spPr>
+      </p:pic>
+      <p:sp>
+        <p:nvSpPr>
+          <p:cNvPr id="14" name="TextBox 13"/>
           <p:cNvSpPr txBox="1"/>
           <p:nvPr/>
         </p:nvSpPr>
         <p:spPr>
           <a:xfrm>
-            <a:off x="6355080" y="3429000"/>
-            <a:ext cx="4937760" cy="2651760"/>
+            <a:off x="6949440" y="3273552"/>
+            <a:ext cx="4297680" cy="2807208"/>
           </a:xfrm>
           <a:prstGeom prst="rect">
             <a:avLst/>
@@ -6336,16 +7676,16 @@
           <a:noFill/>
         </p:spPr>
         <p:txBody>
-          <a:bodyPr wrap="square">
+          <a:bodyPr wrap="square" lIns="0" tIns="0" rIns="0" bIns="0">
             <a:spAutoFit/>
           </a:bodyPr>
           <a:lstStyle/>
           <a:p>
             <a:pPr>
               <a:spcAft>
-                <a:spcPts val="600"/>
+                <a:spcPts val="300"/>
               </a:spcAft>
-              <a:defRPr sz="1500" b="1">
+              <a:defRPr sz="1450" b="1">
                 <a:solidFill>
                   <a:srgbClr val="F8FAFC"/>
                 </a:solidFill>
@@ -6358,7 +7698,7 @@
           <a:p>
             <a:pPr>
               <a:spcAft>
-                <a:spcPts val="600"/>
+                <a:spcPts val="400"/>
               </a:spcAft>
               <a:defRPr sz="950" b="1">
                 <a:solidFill>
@@ -6372,7 +7712,7 @@
           </a:p>
           <a:p>
             <a:pPr>
-              <a:defRPr sz="1150">
+              <a:defRPr sz="1100">
                 <a:solidFill>
                   <a:srgbClr val="94A3B8"/>
                 </a:solidFill>
@@ -6453,8 +7793,8 @@
         </p:nvSpPr>
         <p:spPr>
           <a:xfrm>
-            <a:off x="731520" y="457200"/>
-            <a:ext cx="10698480" cy="365760"/>
+            <a:off x="731520" y="411480"/>
+            <a:ext cx="10698480" cy="320040"/>
           </a:xfrm>
           <a:prstGeom prst="rect">
             <a:avLst/>
@@ -6462,7 +7802,7 @@
           <a:noFill/>
         </p:spPr>
         <p:txBody>
-          <a:bodyPr wrap="square">
+          <a:bodyPr wrap="square" lIns="0" tIns="0" rIns="0" bIns="0">
             <a:spAutoFit/>
           </a:bodyPr>
           <a:lstStyle/>
@@ -6488,8 +7828,8 @@
         </p:nvSpPr>
         <p:spPr>
           <a:xfrm>
-            <a:off x="731520" y="777240"/>
-            <a:ext cx="10698480" cy="731520"/>
+            <a:off x="731520" y="731520"/>
+            <a:ext cx="10698480" cy="685800"/>
           </a:xfrm>
           <a:prstGeom prst="rect">
             <a:avLst/>
@@ -6497,13 +7837,13 @@
           <a:noFill/>
         </p:spPr>
         <p:txBody>
-          <a:bodyPr wrap="square">
+          <a:bodyPr wrap="square" lIns="0" tIns="0" rIns="0" bIns="0">
             <a:spAutoFit/>
           </a:bodyPr>
           <a:lstStyle/>
           <a:p>
             <a:pPr>
-              <a:defRPr sz="2600" b="1">
+              <a:defRPr sz="2400" b="1">
                 <a:solidFill>
                   <a:srgbClr val="F8FAFC"/>
                 </a:solidFill>
@@ -6523,8 +7863,8 @@
         </p:nvSpPr>
         <p:spPr>
           <a:xfrm>
-            <a:off x="731520" y="1645920"/>
-            <a:ext cx="5212080" cy="4572000"/>
+            <a:off x="731520" y="1600200"/>
+            <a:ext cx="5212080" cy="4663440"/>
           </a:xfrm>
           <a:prstGeom prst="roundRect">
             <a:avLst/>
@@ -6562,14 +7902,81 @@
       </p:sp>
       <p:sp>
         <p:nvSpPr>
-          <p:cNvPr id="6" name="TextBox 5"/>
+          <p:cNvPr id="6" name="Rounded Rectangle 5"/>
+          <p:cNvSpPr/>
+          <p:nvPr/>
+        </p:nvSpPr>
+        <p:spPr>
+          <a:xfrm>
+            <a:off x="932688" y="1764792"/>
+            <a:ext cx="438912" cy="438912"/>
+          </a:xfrm>
+          <a:prstGeom prst="roundRect">
+            <a:avLst/>
+          </a:prstGeom>
+          <a:solidFill>
+            <a:srgbClr val="103040"/>
+          </a:solidFill>
+          <a:ln>
+            <a:noFill/>
+          </a:ln>
+        </p:spPr>
+        <p:style>
+          <a:lnRef idx="1">
+            <a:schemeClr val="accent1"/>
+          </a:lnRef>
+          <a:fillRef idx="3">
+            <a:schemeClr val="accent1"/>
+          </a:fillRef>
+          <a:effectRef idx="2">
+            <a:schemeClr val="accent1"/>
+          </a:effectRef>
+          <a:fontRef idx="minor">
+            <a:schemeClr val="lt1"/>
+          </a:fontRef>
+        </p:style>
+        <p:txBody>
+          <a:bodyPr rtlCol="0" anchor="ctr"/>
+          <a:lstStyle/>
+          <a:p>
+            <a:pPr algn="ctr"/>
+          </a:p>
+        </p:txBody>
+      </p:sp>
+      <p:pic>
+        <p:nvPicPr>
+          <p:cNvPr id="7" name="Picture 6" descr="moon_cyan.png"/>
+          <p:cNvPicPr>
+            <a:picLocks noChangeAspect="1"/>
+          </p:cNvPicPr>
+          <p:nvPr/>
+        </p:nvPicPr>
+        <p:blipFill>
+          <a:blip r:embed="rId2"/>
+          <a:stretch>
+            <a:fillRect/>
+          </a:stretch>
+        </p:blipFill>
+        <p:spPr>
+          <a:xfrm>
+            <a:off x="987552" y="1819656"/>
+            <a:ext cx="329184" cy="329184"/>
+          </a:xfrm>
+          <a:prstGeom prst="rect">
+            <a:avLst/>
+          </a:prstGeom>
+        </p:spPr>
+      </p:pic>
+      <p:sp>
+        <p:nvSpPr>
+          <p:cNvPr id="8" name="TextBox 7"/>
           <p:cNvSpPr txBox="1"/>
           <p:nvPr/>
         </p:nvSpPr>
         <p:spPr>
           <a:xfrm>
-            <a:off x="868680" y="1783080"/>
-            <a:ext cx="4937760" cy="4297680"/>
+            <a:off x="1463040" y="1764792"/>
+            <a:ext cx="4297680" cy="4361688"/>
           </a:xfrm>
           <a:prstGeom prst="rect">
             <a:avLst/>
@@ -6577,16 +7984,16 @@
           <a:noFill/>
         </p:spPr>
         <p:txBody>
-          <a:bodyPr wrap="square">
+          <a:bodyPr wrap="square" lIns="0" tIns="0" rIns="0" bIns="0">
             <a:spAutoFit/>
           </a:bodyPr>
           <a:lstStyle/>
           <a:p>
             <a:pPr>
               <a:spcAft>
-                <a:spcPts val="600"/>
+                <a:spcPts val="300"/>
               </a:spcAft>
-              <a:defRPr sz="1500" b="1">
+              <a:defRPr sz="1450" b="1">
                 <a:solidFill>
                   <a:srgbClr val="F8FAFC"/>
                 </a:solidFill>
@@ -6599,7 +8006,7 @@
           <a:p>
             <a:pPr>
               <a:spcAft>
-                <a:spcPts val="600"/>
+                <a:spcPts val="400"/>
               </a:spcAft>
               <a:defRPr sz="950" b="1">
                 <a:solidFill>
@@ -6613,7 +8020,7 @@
           </a:p>
           <a:p>
             <a:pPr>
-              <a:defRPr sz="1150">
+              <a:defRPr sz="1100">
                 <a:solidFill>
                   <a:srgbClr val="94A3B8"/>
                 </a:solidFill>
@@ -6642,14 +8049,14 @@
       </p:sp>
       <p:sp>
         <p:nvSpPr>
-          <p:cNvPr id="7" name="Rounded Rectangle 6"/>
+          <p:cNvPr id="9" name="Rounded Rectangle 8"/>
           <p:cNvSpPr/>
           <p:nvPr/>
         </p:nvSpPr>
         <p:spPr>
           <a:xfrm>
-            <a:off x="6217920" y="1645920"/>
-            <a:ext cx="5212080" cy="4572000"/>
+            <a:off x="6217920" y="1600200"/>
+            <a:ext cx="5212080" cy="4663440"/>
           </a:xfrm>
           <a:prstGeom prst="roundRect">
             <a:avLst/>
@@ -6687,14 +8094,81 @@
       </p:sp>
       <p:sp>
         <p:nvSpPr>
-          <p:cNvPr id="8" name="TextBox 7"/>
+          <p:cNvPr id="10" name="Rounded Rectangle 9"/>
+          <p:cNvSpPr/>
+          <p:nvPr/>
+        </p:nvSpPr>
+        <p:spPr>
+          <a:xfrm>
+            <a:off x="6419088" y="1764792"/>
+            <a:ext cx="438912" cy="438912"/>
+          </a:xfrm>
+          <a:prstGeom prst="roundRect">
+            <a:avLst/>
+          </a:prstGeom>
+          <a:solidFill>
+            <a:srgbClr val="123230"/>
+          </a:solidFill>
+          <a:ln>
+            <a:noFill/>
+          </a:ln>
+        </p:spPr>
+        <p:style>
+          <a:lnRef idx="1">
+            <a:schemeClr val="accent1"/>
+          </a:lnRef>
+          <a:fillRef idx="3">
+            <a:schemeClr val="accent1"/>
+          </a:fillRef>
+          <a:effectRef idx="2">
+            <a:schemeClr val="accent1"/>
+          </a:effectRef>
+          <a:fontRef idx="minor">
+            <a:schemeClr val="lt1"/>
+          </a:fontRef>
+        </p:style>
+        <p:txBody>
+          <a:bodyPr rtlCol="0" anchor="ctr"/>
+          <a:lstStyle/>
+          <a:p>
+            <a:pPr algn="ctr"/>
+          </a:p>
+        </p:txBody>
+      </p:sp>
+      <p:pic>
+        <p:nvPicPr>
+          <p:cNvPr id="11" name="Picture 10" descr="dumbbell_emerald.png"/>
+          <p:cNvPicPr>
+            <a:picLocks noChangeAspect="1"/>
+          </p:cNvPicPr>
+          <p:nvPr/>
+        </p:nvPicPr>
+        <p:blipFill>
+          <a:blip r:embed="rId3"/>
+          <a:stretch>
+            <a:fillRect/>
+          </a:stretch>
+        </p:blipFill>
+        <p:spPr>
+          <a:xfrm>
+            <a:off x="6473952" y="1819656"/>
+            <a:ext cx="329184" cy="329184"/>
+          </a:xfrm>
+          <a:prstGeom prst="rect">
+            <a:avLst/>
+          </a:prstGeom>
+        </p:spPr>
+      </p:pic>
+      <p:sp>
+        <p:nvSpPr>
+          <p:cNvPr id="12" name="TextBox 11"/>
           <p:cNvSpPr txBox="1"/>
           <p:nvPr/>
         </p:nvSpPr>
         <p:spPr>
           <a:xfrm>
-            <a:off x="6355080" y="1783080"/>
-            <a:ext cx="4937760" cy="4297680"/>
+            <a:off x="6949440" y="1764792"/>
+            <a:ext cx="4297680" cy="4361688"/>
           </a:xfrm>
           <a:prstGeom prst="rect">
             <a:avLst/>
@@ -6702,16 +8176,16 @@
           <a:noFill/>
         </p:spPr>
         <p:txBody>
-          <a:bodyPr wrap="square">
+          <a:bodyPr wrap="square" lIns="0" tIns="0" rIns="0" bIns="0">
             <a:spAutoFit/>
           </a:bodyPr>
           <a:lstStyle/>
           <a:p>
             <a:pPr>
               <a:spcAft>
-                <a:spcPts val="600"/>
+                <a:spcPts val="300"/>
               </a:spcAft>
-              <a:defRPr sz="1500" b="1">
+              <a:defRPr sz="1450" b="1">
                 <a:solidFill>
                   <a:srgbClr val="F8FAFC"/>
                 </a:solidFill>
@@ -6724,7 +8198,7 @@
           <a:p>
             <a:pPr>
               <a:spcAft>
-                <a:spcPts val="600"/>
+                <a:spcPts val="400"/>
               </a:spcAft>
               <a:defRPr sz="950" b="1">
                 <a:solidFill>
@@ -6738,7 +8212,7 @@
           </a:p>
           <a:p>
             <a:pPr>
-              <a:defRPr sz="1150">
+              <a:defRPr sz="1100">
                 <a:solidFill>
                   <a:srgbClr val="94A3B8"/>
                 </a:solidFill>
@@ -6834,8 +8308,8 @@
         </p:nvSpPr>
         <p:spPr>
           <a:xfrm>
-            <a:off x="731520" y="457200"/>
-            <a:ext cx="10698480" cy="365760"/>
+            <a:off x="731520" y="411480"/>
+            <a:ext cx="10698480" cy="320040"/>
           </a:xfrm>
           <a:prstGeom prst="rect">
             <a:avLst/>
@@ -6843,7 +8317,7 @@
           <a:noFill/>
         </p:spPr>
         <p:txBody>
-          <a:bodyPr wrap="square">
+          <a:bodyPr wrap="square" lIns="0" tIns="0" rIns="0" bIns="0">
             <a:spAutoFit/>
           </a:bodyPr>
           <a:lstStyle/>
@@ -6869,8 +8343,8 @@
         </p:nvSpPr>
         <p:spPr>
           <a:xfrm>
-            <a:off x="731520" y="777240"/>
-            <a:ext cx="10698480" cy="731520"/>
+            <a:off x="731520" y="731520"/>
+            <a:ext cx="10698480" cy="685800"/>
           </a:xfrm>
           <a:prstGeom prst="rect">
             <a:avLst/>
@@ -6878,13 +8352,13 @@
           <a:noFill/>
         </p:spPr>
         <p:txBody>
-          <a:bodyPr wrap="square">
+          <a:bodyPr wrap="square" lIns="0" tIns="0" rIns="0" bIns="0">
             <a:spAutoFit/>
           </a:bodyPr>
           <a:lstStyle/>
           <a:p>
             <a:pPr>
-              <a:defRPr sz="2600" b="1">
+              <a:defRPr sz="2400" b="1">
                 <a:solidFill>
                   <a:srgbClr val="F8FAFC"/>
                 </a:solidFill>
@@ -6904,8 +8378,8 @@
         </p:nvSpPr>
         <p:spPr>
           <a:xfrm>
-            <a:off x="731520" y="1645920"/>
-            <a:ext cx="5212080" cy="2926080"/>
+            <a:off x="731520" y="1600200"/>
+            <a:ext cx="5212080" cy="3017520"/>
           </a:xfrm>
           <a:prstGeom prst="roundRect">
             <a:avLst/>
@@ -6943,14 +8417,81 @@
       </p:sp>
       <p:sp>
         <p:nvSpPr>
-          <p:cNvPr id="6" name="TextBox 5"/>
+          <p:cNvPr id="6" name="Rounded Rectangle 5"/>
+          <p:cNvSpPr/>
+          <p:nvPr/>
+        </p:nvSpPr>
+        <p:spPr>
+          <a:xfrm>
+            <a:off x="932688" y="1764792"/>
+            <a:ext cx="438912" cy="438912"/>
+          </a:xfrm>
+          <a:prstGeom prst="roundRect">
+            <a:avLst/>
+          </a:prstGeom>
+          <a:solidFill>
+            <a:srgbClr val="123230"/>
+          </a:solidFill>
+          <a:ln>
+            <a:noFill/>
+          </a:ln>
+        </p:spPr>
+        <p:style>
+          <a:lnRef idx="1">
+            <a:schemeClr val="accent1"/>
+          </a:lnRef>
+          <a:fillRef idx="3">
+            <a:schemeClr val="accent1"/>
+          </a:fillRef>
+          <a:effectRef idx="2">
+            <a:schemeClr val="accent1"/>
+          </a:effectRef>
+          <a:fontRef idx="minor">
+            <a:schemeClr val="lt1"/>
+          </a:fontRef>
+        </p:style>
+        <p:txBody>
+          <a:bodyPr rtlCol="0" anchor="ctr"/>
+          <a:lstStyle/>
+          <a:p>
+            <a:pPr algn="ctr"/>
+          </a:p>
+        </p:txBody>
+      </p:sp>
+      <p:pic>
+        <p:nvPicPr>
+          <p:cNvPr id="7" name="Picture 6" descr="users_emerald.png"/>
+          <p:cNvPicPr>
+            <a:picLocks noChangeAspect="1"/>
+          </p:cNvPicPr>
+          <p:nvPr/>
+        </p:nvPicPr>
+        <p:blipFill>
+          <a:blip r:embed="rId2"/>
+          <a:stretch>
+            <a:fillRect/>
+          </a:stretch>
+        </p:blipFill>
+        <p:spPr>
+          <a:xfrm>
+            <a:off x="987552" y="1819656"/>
+            <a:ext cx="329184" cy="329184"/>
+          </a:xfrm>
+          <a:prstGeom prst="rect">
+            <a:avLst/>
+          </a:prstGeom>
+        </p:spPr>
+      </p:pic>
+      <p:sp>
+        <p:nvSpPr>
+          <p:cNvPr id="8" name="TextBox 7"/>
           <p:cNvSpPr txBox="1"/>
           <p:nvPr/>
         </p:nvSpPr>
         <p:spPr>
           <a:xfrm>
-            <a:off x="868680" y="1783080"/>
-            <a:ext cx="4937760" cy="2651760"/>
+            <a:off x="1463040" y="1764792"/>
+            <a:ext cx="4297680" cy="2715768"/>
           </a:xfrm>
           <a:prstGeom prst="rect">
             <a:avLst/>
@@ -6958,16 +8499,16 @@
           <a:noFill/>
         </p:spPr>
         <p:txBody>
-          <a:bodyPr wrap="square">
+          <a:bodyPr wrap="square" lIns="0" tIns="0" rIns="0" bIns="0">
             <a:spAutoFit/>
           </a:bodyPr>
           <a:lstStyle/>
           <a:p>
             <a:pPr>
               <a:spcAft>
-                <a:spcPts val="600"/>
+                <a:spcPts val="300"/>
               </a:spcAft>
-              <a:defRPr sz="1500" b="1">
+              <a:defRPr sz="1450" b="1">
                 <a:solidFill>
                   <a:srgbClr val="F8FAFC"/>
                 </a:solidFill>
@@ -6980,7 +8521,7 @@
           <a:p>
             <a:pPr>
               <a:spcAft>
-                <a:spcPts val="600"/>
+                <a:spcPts val="400"/>
               </a:spcAft>
               <a:defRPr sz="950" b="1">
                 <a:solidFill>
@@ -6994,7 +8535,7 @@
           </a:p>
           <a:p>
             <a:pPr>
-              <a:defRPr sz="1150">
+              <a:defRPr sz="1100">
                 <a:solidFill>
                   <a:srgbClr val="94A3B8"/>
                 </a:solidFill>
@@ -7013,14 +8554,14 @@
       </p:sp>
       <p:sp>
         <p:nvSpPr>
-          <p:cNvPr id="7" name="Rounded Rectangle 6"/>
+          <p:cNvPr id="9" name="Rounded Rectangle 8"/>
           <p:cNvSpPr/>
           <p:nvPr/>
         </p:nvSpPr>
         <p:spPr>
           <a:xfrm>
-            <a:off x="6217920" y="1645920"/>
-            <a:ext cx="5212080" cy="2926080"/>
+            <a:off x="6217920" y="1600200"/>
+            <a:ext cx="5212080" cy="3017520"/>
           </a:xfrm>
           <a:prstGeom prst="roundRect">
             <a:avLst/>
@@ -7058,14 +8599,81 @@
       </p:sp>
       <p:sp>
         <p:nvSpPr>
-          <p:cNvPr id="8" name="TextBox 7"/>
+          <p:cNvPr id="10" name="Rounded Rectangle 9"/>
+          <p:cNvSpPr/>
+          <p:nvPr/>
+        </p:nvSpPr>
+        <p:spPr>
+          <a:xfrm>
+            <a:off x="6419088" y="1764792"/>
+            <a:ext cx="438912" cy="438912"/>
+          </a:xfrm>
+          <a:prstGeom prst="roundRect">
+            <a:avLst/>
+          </a:prstGeom>
+          <a:solidFill>
+            <a:srgbClr val="103040"/>
+          </a:solidFill>
+          <a:ln>
+            <a:noFill/>
+          </a:ln>
+        </p:spPr>
+        <p:style>
+          <a:lnRef idx="1">
+            <a:schemeClr val="accent1"/>
+          </a:lnRef>
+          <a:fillRef idx="3">
+            <a:schemeClr val="accent1"/>
+          </a:fillRef>
+          <a:effectRef idx="2">
+            <a:schemeClr val="accent1"/>
+          </a:effectRef>
+          <a:fontRef idx="minor">
+            <a:schemeClr val="lt1"/>
+          </a:fontRef>
+        </p:style>
+        <p:txBody>
+          <a:bodyPr rtlCol="0" anchor="ctr"/>
+          <a:lstStyle/>
+          <a:p>
+            <a:pPr algn="ctr"/>
+          </a:p>
+        </p:txBody>
+      </p:sp>
+      <p:pic>
+        <p:nvPicPr>
+          <p:cNvPr id="11" name="Picture 10" descr="mic_cyan.png"/>
+          <p:cNvPicPr>
+            <a:picLocks noChangeAspect="1"/>
+          </p:cNvPicPr>
+          <p:nvPr/>
+        </p:nvPicPr>
+        <p:blipFill>
+          <a:blip r:embed="rId3"/>
+          <a:stretch>
+            <a:fillRect/>
+          </a:stretch>
+        </p:blipFill>
+        <p:spPr>
+          <a:xfrm>
+            <a:off x="6473952" y="1819656"/>
+            <a:ext cx="329184" cy="329184"/>
+          </a:xfrm>
+          <a:prstGeom prst="rect">
+            <a:avLst/>
+          </a:prstGeom>
+        </p:spPr>
+      </p:pic>
+      <p:sp>
+        <p:nvSpPr>
+          <p:cNvPr id="12" name="TextBox 11"/>
           <p:cNvSpPr txBox="1"/>
           <p:nvPr/>
         </p:nvSpPr>
         <p:spPr>
           <a:xfrm>
-            <a:off x="6355080" y="1783080"/>
-            <a:ext cx="4937760" cy="2651760"/>
+            <a:off x="6949440" y="1764792"/>
+            <a:ext cx="4297680" cy="2715768"/>
           </a:xfrm>
           <a:prstGeom prst="rect">
             <a:avLst/>
@@ -7073,16 +8681,16 @@
           <a:noFill/>
         </p:spPr>
         <p:txBody>
-          <a:bodyPr wrap="square">
+          <a:bodyPr wrap="square" lIns="0" tIns="0" rIns="0" bIns="0">
             <a:spAutoFit/>
           </a:bodyPr>
           <a:lstStyle/>
           <a:p>
             <a:pPr>
               <a:spcAft>
-                <a:spcPts val="600"/>
+                <a:spcPts val="300"/>
               </a:spcAft>
-              <a:defRPr sz="1500" b="1">
+              <a:defRPr sz="1450" b="1">
                 <a:solidFill>
                   <a:srgbClr val="F8FAFC"/>
                 </a:solidFill>
@@ -7095,7 +8703,7 @@
           <a:p>
             <a:pPr>
               <a:spcAft>
-                <a:spcPts val="600"/>
+                <a:spcPts val="400"/>
               </a:spcAft>
               <a:defRPr sz="950" b="1">
                 <a:solidFill>
@@ -7109,7 +8717,7 @@
           </a:p>
           <a:p>
             <a:pPr>
-              <a:defRPr sz="1150">
+              <a:defRPr sz="1100">
                 <a:solidFill>
                   <a:srgbClr val="94A3B8"/>
                 </a:solidFill>
@@ -7128,13 +8736,13 @@
       </p:sp>
       <p:sp>
         <p:nvSpPr>
-          <p:cNvPr id="9" name="Rounded Rectangle 8"/>
+          <p:cNvPr id="13" name="Rounded Rectangle 12"/>
           <p:cNvSpPr/>
           <p:nvPr/>
         </p:nvSpPr>
         <p:spPr>
           <a:xfrm>
-            <a:off x="731520" y="4754880"/>
+            <a:off x="731520" y="4846320"/>
             <a:ext cx="10698480" cy="1463040"/>
           </a:xfrm>
           <a:prstGeom prst="roundRect">
@@ -7173,14 +8781,81 @@
       </p:sp>
       <p:sp>
         <p:nvSpPr>
-          <p:cNvPr id="10" name="TextBox 9"/>
+          <p:cNvPr id="14" name="Rounded Rectangle 13"/>
+          <p:cNvSpPr/>
+          <p:nvPr/>
+        </p:nvSpPr>
+        <p:spPr>
+          <a:xfrm>
+            <a:off x="932688" y="5010912"/>
+            <a:ext cx="438912" cy="438912"/>
+          </a:xfrm>
+          <a:prstGeom prst="roundRect">
+            <a:avLst/>
+          </a:prstGeom>
+          <a:solidFill>
+            <a:srgbClr val="382C14"/>
+          </a:solidFill>
+          <a:ln>
+            <a:noFill/>
+          </a:ln>
+        </p:spPr>
+        <p:style>
+          <a:lnRef idx="1">
+            <a:schemeClr val="accent1"/>
+          </a:lnRef>
+          <a:fillRef idx="3">
+            <a:schemeClr val="accent1"/>
+          </a:fillRef>
+          <a:effectRef idx="2">
+            <a:schemeClr val="accent1"/>
+          </a:effectRef>
+          <a:fontRef idx="minor">
+            <a:schemeClr val="lt1"/>
+          </a:fontRef>
+        </p:style>
+        <p:txBody>
+          <a:bodyPr rtlCol="0" anchor="ctr"/>
+          <a:lstStyle/>
+          <a:p>
+            <a:pPr algn="ctr"/>
+          </a:p>
+        </p:txBody>
+      </p:sp>
+      <p:pic>
+        <p:nvPicPr>
+          <p:cNvPr id="15" name="Picture 14" descr="database_amber.png"/>
+          <p:cNvPicPr>
+            <a:picLocks noChangeAspect="1"/>
+          </p:cNvPicPr>
+          <p:nvPr/>
+        </p:nvPicPr>
+        <p:blipFill>
+          <a:blip r:embed="rId4"/>
+          <a:stretch>
+            <a:fillRect/>
+          </a:stretch>
+        </p:blipFill>
+        <p:spPr>
+          <a:xfrm>
+            <a:off x="987552" y="5065776"/>
+            <a:ext cx="329184" cy="329184"/>
+          </a:xfrm>
+          <a:prstGeom prst="rect">
+            <a:avLst/>
+          </a:prstGeom>
+        </p:spPr>
+      </p:pic>
+      <p:sp>
+        <p:nvSpPr>
+          <p:cNvPr id="16" name="TextBox 15"/>
           <p:cNvSpPr txBox="1"/>
           <p:nvPr/>
         </p:nvSpPr>
         <p:spPr>
           <a:xfrm>
-            <a:off x="868680" y="4892040"/>
-            <a:ext cx="10424159" cy="1188720"/>
+            <a:off x="1463040" y="5010912"/>
+            <a:ext cx="9784080" cy="1161288"/>
           </a:xfrm>
           <a:prstGeom prst="rect">
             <a:avLst/>
@@ -7188,16 +8863,16 @@
           <a:noFill/>
         </p:spPr>
         <p:txBody>
-          <a:bodyPr wrap="square">
+          <a:bodyPr wrap="square" lIns="0" tIns="0" rIns="0" bIns="0">
             <a:spAutoFit/>
           </a:bodyPr>
           <a:lstStyle/>
           <a:p>
             <a:pPr>
               <a:spcAft>
-                <a:spcPts val="600"/>
+                <a:spcPts val="300"/>
               </a:spcAft>
-              <a:defRPr sz="1500" b="1">
+              <a:defRPr sz="1450" b="1">
                 <a:solidFill>
                   <a:srgbClr val="F8FAFC"/>
                 </a:solidFill>
@@ -7210,7 +8885,7 @@
           <a:p>
             <a:pPr>
               <a:spcAft>
-                <a:spcPts val="600"/>
+                <a:spcPts val="400"/>
               </a:spcAft>
               <a:defRPr sz="950" b="1">
                 <a:solidFill>
@@ -7224,7 +8899,7 @@
           </a:p>
           <a:p>
             <a:pPr>
-              <a:defRPr sz="1150">
+              <a:defRPr sz="1100">
                 <a:solidFill>
                   <a:srgbClr val="94A3B8"/>
                 </a:solidFill>
@@ -7305,8 +8980,8 @@
         </p:nvSpPr>
         <p:spPr>
           <a:xfrm>
-            <a:off x="731520" y="457200"/>
-            <a:ext cx="10698480" cy="365760"/>
+            <a:off x="731520" y="411480"/>
+            <a:ext cx="10698480" cy="320040"/>
           </a:xfrm>
           <a:prstGeom prst="rect">
             <a:avLst/>
@@ -7314,7 +8989,7 @@
           <a:noFill/>
         </p:spPr>
         <p:txBody>
-          <a:bodyPr wrap="square">
+          <a:bodyPr wrap="square" lIns="0" tIns="0" rIns="0" bIns="0">
             <a:spAutoFit/>
           </a:bodyPr>
           <a:lstStyle/>
@@ -7340,8 +9015,8 @@
         </p:nvSpPr>
         <p:spPr>
           <a:xfrm>
-            <a:off x="731520" y="777240"/>
-            <a:ext cx="10698480" cy="731520"/>
+            <a:off x="731520" y="731520"/>
+            <a:ext cx="10698480" cy="685800"/>
           </a:xfrm>
           <a:prstGeom prst="rect">
             <a:avLst/>
@@ -7349,13 +9024,13 @@
           <a:noFill/>
         </p:spPr>
         <p:txBody>
-          <a:bodyPr wrap="square">
+          <a:bodyPr wrap="square" lIns="0" tIns="0" rIns="0" bIns="0">
             <a:spAutoFit/>
           </a:bodyPr>
           <a:lstStyle/>
           <a:p>
             <a:pPr>
-              <a:defRPr sz="2600" b="1">
+              <a:defRPr sz="2400" b="1">
                 <a:solidFill>
                   <a:srgbClr val="F8FAFC"/>
                 </a:solidFill>
@@ -7375,7 +9050,7 @@
         </p:nvSpPr>
         <p:spPr>
           <a:xfrm>
-            <a:off x="731520" y="1645920"/>
+            <a:off x="731520" y="1600200"/>
             <a:ext cx="3383280" cy="2468880"/>
           </a:xfrm>
           <a:prstGeom prst="roundRect">
@@ -7414,14 +9089,81 @@
       </p:sp>
       <p:sp>
         <p:nvSpPr>
-          <p:cNvPr id="6" name="TextBox 5"/>
+          <p:cNvPr id="6" name="Rounded Rectangle 5"/>
+          <p:cNvSpPr/>
+          <p:nvPr/>
+        </p:nvSpPr>
+        <p:spPr>
+          <a:xfrm>
+            <a:off x="932688" y="1764792"/>
+            <a:ext cx="438912" cy="438912"/>
+          </a:xfrm>
+          <a:prstGeom prst="roundRect">
+            <a:avLst/>
+          </a:prstGeom>
+          <a:solidFill>
+            <a:srgbClr val="123230"/>
+          </a:solidFill>
+          <a:ln>
+            <a:noFill/>
+          </a:ln>
+        </p:spPr>
+        <p:style>
+          <a:lnRef idx="1">
+            <a:schemeClr val="accent1"/>
+          </a:lnRef>
+          <a:fillRef idx="3">
+            <a:schemeClr val="accent1"/>
+          </a:fillRef>
+          <a:effectRef idx="2">
+            <a:schemeClr val="accent1"/>
+          </a:effectRef>
+          <a:fontRef idx="minor">
+            <a:schemeClr val="lt1"/>
+          </a:fontRef>
+        </p:style>
+        <p:txBody>
+          <a:bodyPr rtlCol="0" anchor="ctr"/>
+          <a:lstStyle/>
+          <a:p>
+            <a:pPr algn="ctr"/>
+          </a:p>
+        </p:txBody>
+      </p:sp>
+      <p:pic>
+        <p:nvPicPr>
+          <p:cNvPr id="7" name="Picture 6" descr="server_emerald.png"/>
+          <p:cNvPicPr>
+            <a:picLocks noChangeAspect="1"/>
+          </p:cNvPicPr>
+          <p:nvPr/>
+        </p:nvPicPr>
+        <p:blipFill>
+          <a:blip r:embed="rId2"/>
+          <a:stretch>
+            <a:fillRect/>
+          </a:stretch>
+        </p:blipFill>
+        <p:spPr>
+          <a:xfrm>
+            <a:off x="987552" y="1819656"/>
+            <a:ext cx="329184" cy="329184"/>
+          </a:xfrm>
+          <a:prstGeom prst="rect">
+            <a:avLst/>
+          </a:prstGeom>
+        </p:spPr>
+      </p:pic>
+      <p:sp>
+        <p:nvSpPr>
+          <p:cNvPr id="8" name="TextBox 7"/>
           <p:cNvSpPr txBox="1"/>
           <p:nvPr/>
         </p:nvSpPr>
         <p:spPr>
           <a:xfrm>
-            <a:off x="868680" y="1783080"/>
-            <a:ext cx="3108960" cy="2194560"/>
+            <a:off x="1463040" y="1764792"/>
+            <a:ext cx="2468880" cy="2167128"/>
           </a:xfrm>
           <a:prstGeom prst="rect">
             <a:avLst/>
@@ -7429,16 +9171,16 @@
           <a:noFill/>
         </p:spPr>
         <p:txBody>
-          <a:bodyPr wrap="square">
+          <a:bodyPr wrap="square" lIns="0" tIns="0" rIns="0" bIns="0">
             <a:spAutoFit/>
           </a:bodyPr>
           <a:lstStyle/>
           <a:p>
             <a:pPr>
               <a:spcAft>
-                <a:spcPts val="600"/>
+                <a:spcPts val="300"/>
               </a:spcAft>
-              <a:defRPr sz="1500" b="1">
+              <a:defRPr sz="1450" b="1">
                 <a:solidFill>
                   <a:srgbClr val="F8FAFC"/>
                 </a:solidFill>
@@ -7451,7 +9193,7 @@
           <a:p>
             <a:pPr>
               <a:spcAft>
-                <a:spcPts val="600"/>
+                <a:spcPts val="400"/>
               </a:spcAft>
               <a:defRPr sz="950" b="1">
                 <a:solidFill>
@@ -7465,7 +9207,7 @@
           </a:p>
           <a:p>
             <a:pPr>
-              <a:defRPr sz="1150">
+              <a:defRPr sz="1100">
                 <a:solidFill>
                   <a:srgbClr val="94A3B8"/>
                 </a:solidFill>
@@ -7479,13 +9221,13 @@
       </p:sp>
       <p:sp>
         <p:nvSpPr>
-          <p:cNvPr id="7" name="Rounded Rectangle 6"/>
+          <p:cNvPr id="9" name="Rounded Rectangle 8"/>
           <p:cNvSpPr/>
           <p:nvPr/>
         </p:nvSpPr>
         <p:spPr>
           <a:xfrm>
-            <a:off x="4389120" y="1645920"/>
+            <a:off x="4389120" y="1600200"/>
             <a:ext cx="3383280" cy="2468880"/>
           </a:xfrm>
           <a:prstGeom prst="roundRect">
@@ -7524,14 +9266,81 @@
       </p:sp>
       <p:sp>
         <p:nvSpPr>
-          <p:cNvPr id="8" name="TextBox 7"/>
+          <p:cNvPr id="10" name="Rounded Rectangle 9"/>
+          <p:cNvSpPr/>
+          <p:nvPr/>
+        </p:nvSpPr>
+        <p:spPr>
+          <a:xfrm>
+            <a:off x="4590288" y="1764792"/>
+            <a:ext cx="438912" cy="438912"/>
+          </a:xfrm>
+          <a:prstGeom prst="roundRect">
+            <a:avLst/>
+          </a:prstGeom>
+          <a:solidFill>
+            <a:srgbClr val="103040"/>
+          </a:solidFill>
+          <a:ln>
+            <a:noFill/>
+          </a:ln>
+        </p:spPr>
+        <p:style>
+          <a:lnRef idx="1">
+            <a:schemeClr val="accent1"/>
+          </a:lnRef>
+          <a:fillRef idx="3">
+            <a:schemeClr val="accent1"/>
+          </a:fillRef>
+          <a:effectRef idx="2">
+            <a:schemeClr val="accent1"/>
+          </a:effectRef>
+          <a:fontRef idx="minor">
+            <a:schemeClr val="lt1"/>
+          </a:fontRef>
+        </p:style>
+        <p:txBody>
+          <a:bodyPr rtlCol="0" anchor="ctr"/>
+          <a:lstStyle/>
+          <a:p>
+            <a:pPr algn="ctr"/>
+          </a:p>
+        </p:txBody>
+      </p:sp>
+      <p:pic>
+        <p:nvPicPr>
+          <p:cNvPr id="11" name="Picture 10" descr="cpu_cyan.png"/>
+          <p:cNvPicPr>
+            <a:picLocks noChangeAspect="1"/>
+          </p:cNvPicPr>
+          <p:nvPr/>
+        </p:nvPicPr>
+        <p:blipFill>
+          <a:blip r:embed="rId3"/>
+          <a:stretch>
+            <a:fillRect/>
+          </a:stretch>
+        </p:blipFill>
+        <p:spPr>
+          <a:xfrm>
+            <a:off x="4645152" y="1819656"/>
+            <a:ext cx="329184" cy="329184"/>
+          </a:xfrm>
+          <a:prstGeom prst="rect">
+            <a:avLst/>
+          </a:prstGeom>
+        </p:spPr>
+      </p:pic>
+      <p:sp>
+        <p:nvSpPr>
+          <p:cNvPr id="12" name="TextBox 11"/>
           <p:cNvSpPr txBox="1"/>
           <p:nvPr/>
         </p:nvSpPr>
         <p:spPr>
           <a:xfrm>
-            <a:off x="4526280" y="1783080"/>
-            <a:ext cx="3108960" cy="2194560"/>
+            <a:off x="5120640" y="1764792"/>
+            <a:ext cx="2468880" cy="2167128"/>
           </a:xfrm>
           <a:prstGeom prst="rect">
             <a:avLst/>
@@ -7539,16 +9348,16 @@
           <a:noFill/>
         </p:spPr>
         <p:txBody>
-          <a:bodyPr wrap="square">
+          <a:bodyPr wrap="square" lIns="0" tIns="0" rIns="0" bIns="0">
             <a:spAutoFit/>
           </a:bodyPr>
           <a:lstStyle/>
           <a:p>
             <a:pPr>
               <a:spcAft>
-                <a:spcPts val="600"/>
+                <a:spcPts val="300"/>
               </a:spcAft>
-              <a:defRPr sz="1500" b="1">
+              <a:defRPr sz="1450" b="1">
                 <a:solidFill>
                   <a:srgbClr val="F8FAFC"/>
                 </a:solidFill>
@@ -7561,7 +9370,7 @@
           <a:p>
             <a:pPr>
               <a:spcAft>
-                <a:spcPts val="600"/>
+                <a:spcPts val="400"/>
               </a:spcAft>
               <a:defRPr sz="950" b="1">
                 <a:solidFill>
@@ -7575,7 +9384,7 @@
           </a:p>
           <a:p>
             <a:pPr>
-              <a:defRPr sz="1150">
+              <a:defRPr sz="1100">
                 <a:solidFill>
                   <a:srgbClr val="94A3B8"/>
                 </a:solidFill>
@@ -7589,13 +9398,13 @@
       </p:sp>
       <p:sp>
         <p:nvSpPr>
-          <p:cNvPr id="9" name="Rounded Rectangle 8"/>
+          <p:cNvPr id="13" name="Rounded Rectangle 12"/>
           <p:cNvSpPr/>
           <p:nvPr/>
         </p:nvSpPr>
         <p:spPr>
           <a:xfrm>
-            <a:off x="8046720" y="1645920"/>
+            <a:off x="8046720" y="1600200"/>
             <a:ext cx="3383280" cy="2468880"/>
           </a:xfrm>
           <a:prstGeom prst="roundRect">
@@ -7634,14 +9443,81 @@
       </p:sp>
       <p:sp>
         <p:nvSpPr>
-          <p:cNvPr id="10" name="TextBox 9"/>
+          <p:cNvPr id="14" name="Rounded Rectangle 13"/>
+          <p:cNvSpPr/>
+          <p:nvPr/>
+        </p:nvSpPr>
+        <p:spPr>
+          <a:xfrm>
+            <a:off x="8247888" y="1764792"/>
+            <a:ext cx="438912" cy="438912"/>
+          </a:xfrm>
+          <a:prstGeom prst="roundRect">
+            <a:avLst/>
+          </a:prstGeom>
+          <a:solidFill>
+            <a:srgbClr val="382C14"/>
+          </a:solidFill>
+          <a:ln>
+            <a:noFill/>
+          </a:ln>
+        </p:spPr>
+        <p:style>
+          <a:lnRef idx="1">
+            <a:schemeClr val="accent1"/>
+          </a:lnRef>
+          <a:fillRef idx="3">
+            <a:schemeClr val="accent1"/>
+          </a:fillRef>
+          <a:effectRef idx="2">
+            <a:schemeClr val="accent1"/>
+          </a:effectRef>
+          <a:fontRef idx="minor">
+            <a:schemeClr val="lt1"/>
+          </a:fontRef>
+        </p:style>
+        <p:txBody>
+          <a:bodyPr rtlCol="0" anchor="ctr"/>
+          <a:lstStyle/>
+          <a:p>
+            <a:pPr algn="ctr"/>
+          </a:p>
+        </p:txBody>
+      </p:sp>
+      <p:pic>
+        <p:nvPicPr>
+          <p:cNvPr id="15" name="Picture 14" descr="database_amber.png"/>
+          <p:cNvPicPr>
+            <a:picLocks noChangeAspect="1"/>
+          </p:cNvPicPr>
+          <p:nvPr/>
+        </p:nvPicPr>
+        <p:blipFill>
+          <a:blip r:embed="rId4"/>
+          <a:stretch>
+            <a:fillRect/>
+          </a:stretch>
+        </p:blipFill>
+        <p:spPr>
+          <a:xfrm>
+            <a:off x="8302752" y="1819656"/>
+            <a:ext cx="329184" cy="329184"/>
+          </a:xfrm>
+          <a:prstGeom prst="rect">
+            <a:avLst/>
+          </a:prstGeom>
+        </p:spPr>
+      </p:pic>
+      <p:sp>
+        <p:nvSpPr>
+          <p:cNvPr id="16" name="TextBox 15"/>
           <p:cNvSpPr txBox="1"/>
           <p:nvPr/>
         </p:nvSpPr>
         <p:spPr>
           <a:xfrm>
-            <a:off x="8183880" y="1783080"/>
-            <a:ext cx="3108960" cy="2194560"/>
+            <a:off x="8778240" y="1764792"/>
+            <a:ext cx="2468880" cy="2167128"/>
           </a:xfrm>
           <a:prstGeom prst="rect">
             <a:avLst/>
@@ -7649,16 +9525,16 @@
           <a:noFill/>
         </p:spPr>
         <p:txBody>
-          <a:bodyPr wrap="square">
+          <a:bodyPr wrap="square" lIns="0" tIns="0" rIns="0" bIns="0">
             <a:spAutoFit/>
           </a:bodyPr>
           <a:lstStyle/>
           <a:p>
             <a:pPr>
               <a:spcAft>
-                <a:spcPts val="600"/>
+                <a:spcPts val="300"/>
               </a:spcAft>
-              <a:defRPr sz="1500" b="1">
+              <a:defRPr sz="1450" b="1">
                 <a:solidFill>
                   <a:srgbClr val="F8FAFC"/>
                 </a:solidFill>
@@ -7671,7 +9547,7 @@
           <a:p>
             <a:pPr>
               <a:spcAft>
-                <a:spcPts val="600"/>
+                <a:spcPts val="400"/>
               </a:spcAft>
               <a:defRPr sz="950" b="1">
                 <a:solidFill>
@@ -7685,7 +9561,7 @@
           </a:p>
           <a:p>
             <a:pPr>
-              <a:defRPr sz="1150">
+              <a:defRPr sz="1100">
                 <a:solidFill>
                   <a:srgbClr val="94A3B8"/>
                 </a:solidFill>
@@ -7699,7 +9575,7 @@
       </p:sp>
       <p:sp>
         <p:nvSpPr>
-          <p:cNvPr id="11" name="Rounded Rectangle 10"/>
+          <p:cNvPr id="17" name="Rounded Rectangle 16"/>
           <p:cNvSpPr/>
           <p:nvPr/>
         </p:nvSpPr>
@@ -7744,14 +9620,81 @@
       </p:sp>
       <p:sp>
         <p:nvSpPr>
-          <p:cNvPr id="12" name="TextBox 11"/>
+          <p:cNvPr id="18" name="Rounded Rectangle 17"/>
+          <p:cNvSpPr/>
+          <p:nvPr/>
+        </p:nvSpPr>
+        <p:spPr>
+          <a:xfrm>
+            <a:off x="932688" y="4462272"/>
+            <a:ext cx="438912" cy="438912"/>
+          </a:xfrm>
+          <a:prstGeom prst="roundRect">
+            <a:avLst/>
+          </a:prstGeom>
+          <a:solidFill>
+            <a:srgbClr val="103040"/>
+          </a:solidFill>
+          <a:ln>
+            <a:noFill/>
+          </a:ln>
+        </p:spPr>
+        <p:style>
+          <a:lnRef idx="1">
+            <a:schemeClr val="accent1"/>
+          </a:lnRef>
+          <a:fillRef idx="3">
+            <a:schemeClr val="accent1"/>
+          </a:fillRef>
+          <a:effectRef idx="2">
+            <a:schemeClr val="accent1"/>
+          </a:effectRef>
+          <a:fontRef idx="minor">
+            <a:schemeClr val="lt1"/>
+          </a:fontRef>
+        </p:style>
+        <p:txBody>
+          <a:bodyPr rtlCol="0" anchor="ctr"/>
+          <a:lstStyle/>
+          <a:p>
+            <a:pPr algn="ctr"/>
+          </a:p>
+        </p:txBody>
+      </p:sp>
+      <p:pic>
+        <p:nvPicPr>
+          <p:cNvPr id="19" name="Picture 18" descr="phone_cyan.png"/>
+          <p:cNvPicPr>
+            <a:picLocks noChangeAspect="1"/>
+          </p:cNvPicPr>
+          <p:nvPr/>
+        </p:nvPicPr>
+        <p:blipFill>
+          <a:blip r:embed="rId5"/>
+          <a:stretch>
+            <a:fillRect/>
+          </a:stretch>
+        </p:blipFill>
+        <p:spPr>
+          <a:xfrm>
+            <a:off x="987552" y="4517136"/>
+            <a:ext cx="329184" cy="329184"/>
+          </a:xfrm>
+          <a:prstGeom prst="rect">
+            <a:avLst/>
+          </a:prstGeom>
+        </p:spPr>
+      </p:pic>
+      <p:sp>
+        <p:nvSpPr>
+          <p:cNvPr id="20" name="TextBox 19"/>
           <p:cNvSpPr txBox="1"/>
           <p:nvPr/>
         </p:nvSpPr>
         <p:spPr>
           <a:xfrm>
-            <a:off x="868680" y="4434840"/>
-            <a:ext cx="4937760" cy="1645920"/>
+            <a:off x="1463040" y="4462272"/>
+            <a:ext cx="4297680" cy="1618488"/>
           </a:xfrm>
           <a:prstGeom prst="rect">
             <a:avLst/>
@@ -7759,16 +9702,16 @@
           <a:noFill/>
         </p:spPr>
         <p:txBody>
-          <a:bodyPr wrap="square">
+          <a:bodyPr wrap="square" lIns="0" tIns="0" rIns="0" bIns="0">
             <a:spAutoFit/>
           </a:bodyPr>
           <a:lstStyle/>
           <a:p>
             <a:pPr>
               <a:spcAft>
-                <a:spcPts val="600"/>
+                <a:spcPts val="300"/>
               </a:spcAft>
-              <a:defRPr sz="1500" b="1">
+              <a:defRPr sz="1450" b="1">
                 <a:solidFill>
                   <a:srgbClr val="F8FAFC"/>
                 </a:solidFill>
@@ -7781,7 +9724,7 @@
           <a:p>
             <a:pPr>
               <a:spcAft>
-                <a:spcPts val="600"/>
+                <a:spcPts val="400"/>
               </a:spcAft>
               <a:defRPr sz="950" b="1">
                 <a:solidFill>
@@ -7795,7 +9738,7 @@
           </a:p>
           <a:p>
             <a:pPr>
-              <a:defRPr sz="1150">
+              <a:defRPr sz="1100">
                 <a:solidFill>
                   <a:srgbClr val="94A3B8"/>
                 </a:solidFill>
@@ -7809,7 +9752,7 @@
       </p:sp>
       <p:sp>
         <p:nvSpPr>
-          <p:cNvPr id="13" name="Rounded Rectangle 12"/>
+          <p:cNvPr id="21" name="Rounded Rectangle 20"/>
           <p:cNvSpPr/>
           <p:nvPr/>
         </p:nvSpPr>
@@ -7854,14 +9797,81 @@
       </p:sp>
       <p:sp>
         <p:nvSpPr>
-          <p:cNvPr id="14" name="TextBox 13"/>
+          <p:cNvPr id="22" name="Rounded Rectangle 21"/>
+          <p:cNvSpPr/>
+          <p:nvPr/>
+        </p:nvSpPr>
+        <p:spPr>
+          <a:xfrm>
+            <a:off x="6419088" y="4462272"/>
+            <a:ext cx="438912" cy="438912"/>
+          </a:xfrm>
+          <a:prstGeom prst="roundRect">
+            <a:avLst/>
+          </a:prstGeom>
+          <a:solidFill>
+            <a:srgbClr val="382C14"/>
+          </a:solidFill>
+          <a:ln>
+            <a:noFill/>
+          </a:ln>
+        </p:spPr>
+        <p:style>
+          <a:lnRef idx="1">
+            <a:schemeClr val="accent1"/>
+          </a:lnRef>
+          <a:fillRef idx="3">
+            <a:schemeClr val="accent1"/>
+          </a:fillRef>
+          <a:effectRef idx="2">
+            <a:schemeClr val="accent1"/>
+          </a:effectRef>
+          <a:fontRef idx="minor">
+            <a:schemeClr val="lt1"/>
+          </a:fontRef>
+        </p:style>
+        <p:txBody>
+          <a:bodyPr rtlCol="0" anchor="ctr"/>
+          <a:lstStyle/>
+          <a:p>
+            <a:pPr algn="ctr"/>
+          </a:p>
+        </p:txBody>
+      </p:sp>
+      <p:pic>
+        <p:nvPicPr>
+          <p:cNvPr id="23" name="Picture 22" descr="food_amber.png"/>
+          <p:cNvPicPr>
+            <a:picLocks noChangeAspect="1"/>
+          </p:cNvPicPr>
+          <p:nvPr/>
+        </p:nvPicPr>
+        <p:blipFill>
+          <a:blip r:embed="rId6"/>
+          <a:stretch>
+            <a:fillRect/>
+          </a:stretch>
+        </p:blipFill>
+        <p:spPr>
+          <a:xfrm>
+            <a:off x="6473952" y="4517136"/>
+            <a:ext cx="329184" cy="329184"/>
+          </a:xfrm>
+          <a:prstGeom prst="rect">
+            <a:avLst/>
+          </a:prstGeom>
+        </p:spPr>
+      </p:pic>
+      <p:sp>
+        <p:nvSpPr>
+          <p:cNvPr id="24" name="TextBox 23"/>
           <p:cNvSpPr txBox="1"/>
           <p:nvPr/>
         </p:nvSpPr>
         <p:spPr>
           <a:xfrm>
-            <a:off x="6355080" y="4434840"/>
-            <a:ext cx="4937760" cy="1645920"/>
+            <a:off x="6949440" y="4462272"/>
+            <a:ext cx="4297680" cy="1618488"/>
           </a:xfrm>
           <a:prstGeom prst="rect">
             <a:avLst/>
@@ -7869,16 +9879,16 @@
           <a:noFill/>
         </p:spPr>
         <p:txBody>
-          <a:bodyPr wrap="square">
+          <a:bodyPr wrap="square" lIns="0" tIns="0" rIns="0" bIns="0">
             <a:spAutoFit/>
           </a:bodyPr>
           <a:lstStyle/>
           <a:p>
             <a:pPr>
               <a:spcAft>
-                <a:spcPts val="600"/>
+                <a:spcPts val="300"/>
               </a:spcAft>
-              <a:defRPr sz="1500" b="1">
+              <a:defRPr sz="1450" b="1">
                 <a:solidFill>
                   <a:srgbClr val="F8FAFC"/>
                 </a:solidFill>
@@ -7891,7 +9901,7 @@
           <a:p>
             <a:pPr>
               <a:spcAft>
-                <a:spcPts val="600"/>
+                <a:spcPts val="400"/>
               </a:spcAft>
               <a:defRPr sz="950" b="1">
                 <a:solidFill>
@@ -7905,7 +9915,7 @@
           </a:p>
           <a:p>
             <a:pPr>
-              <a:defRPr sz="1150">
+              <a:defRPr sz="1100">
                 <a:solidFill>
                   <a:srgbClr val="94A3B8"/>
                 </a:solidFill>
@@ -7986,8 +9996,8 @@
         </p:nvSpPr>
         <p:spPr>
           <a:xfrm>
-            <a:off x="731520" y="457200"/>
-            <a:ext cx="10698480" cy="365760"/>
+            <a:off x="731520" y="411480"/>
+            <a:ext cx="10698480" cy="320040"/>
           </a:xfrm>
           <a:prstGeom prst="rect">
             <a:avLst/>
@@ -7995,7 +10005,7 @@
           <a:noFill/>
         </p:spPr>
         <p:txBody>
-          <a:bodyPr wrap="square">
+          <a:bodyPr wrap="square" lIns="0" tIns="0" rIns="0" bIns="0">
             <a:spAutoFit/>
           </a:bodyPr>
           <a:lstStyle/>
@@ -8021,8 +10031,8 @@
         </p:nvSpPr>
         <p:spPr>
           <a:xfrm>
-            <a:off x="731520" y="777240"/>
-            <a:ext cx="10698480" cy="731520"/>
+            <a:off x="731520" y="731520"/>
+            <a:ext cx="10698480" cy="685800"/>
           </a:xfrm>
           <a:prstGeom prst="rect">
             <a:avLst/>
@@ -8030,13 +10040,13 @@
           <a:noFill/>
         </p:spPr>
         <p:txBody>
-          <a:bodyPr wrap="square">
+          <a:bodyPr wrap="square" lIns="0" tIns="0" rIns="0" bIns="0">
             <a:spAutoFit/>
           </a:bodyPr>
           <a:lstStyle/>
           <a:p>
             <a:pPr>
-              <a:defRPr sz="2600" b="1">
+              <a:defRPr sz="2400" b="1">
                 <a:solidFill>
                   <a:srgbClr val="F8FAFC"/>
                 </a:solidFill>
@@ -8056,7 +10066,7 @@
         </p:nvSpPr>
         <p:spPr>
           <a:xfrm>
-            <a:off x="731520" y="1645920"/>
+            <a:off x="731520" y="1600200"/>
             <a:ext cx="2514600" cy="3291840"/>
           </a:xfrm>
           <a:prstGeom prst="roundRect">
@@ -8095,14 +10105,81 @@
       </p:sp>
       <p:sp>
         <p:nvSpPr>
-          <p:cNvPr id="6" name="TextBox 5"/>
+          <p:cNvPr id="6" name="Rounded Rectangle 5"/>
+          <p:cNvSpPr/>
+          <p:nvPr/>
+        </p:nvSpPr>
+        <p:spPr>
+          <a:xfrm>
+            <a:off x="932688" y="1764792"/>
+            <a:ext cx="475488" cy="475488"/>
+          </a:xfrm>
+          <a:prstGeom prst="roundRect">
+            <a:avLst/>
+          </a:prstGeom>
+          <a:solidFill>
+            <a:srgbClr val="123230"/>
+          </a:solidFill>
+          <a:ln>
+            <a:noFill/>
+          </a:ln>
+        </p:spPr>
+        <p:style>
+          <a:lnRef idx="1">
+            <a:schemeClr val="accent1"/>
+          </a:lnRef>
+          <a:fillRef idx="3">
+            <a:schemeClr val="accent1"/>
+          </a:fillRef>
+          <a:effectRef idx="2">
+            <a:schemeClr val="accent1"/>
+          </a:effectRef>
+          <a:fontRef idx="minor">
+            <a:schemeClr val="lt1"/>
+          </a:fontRef>
+        </p:style>
+        <p:txBody>
+          <a:bodyPr rtlCol="0" anchor="ctr"/>
+          <a:lstStyle/>
+          <a:p>
+            <a:pPr algn="ctr"/>
+          </a:p>
+        </p:txBody>
+      </p:sp>
+      <p:pic>
+        <p:nvPicPr>
+          <p:cNvPr id="7" name="Picture 6" descr="camera_emerald.png"/>
+          <p:cNvPicPr>
+            <a:picLocks noChangeAspect="1"/>
+          </p:cNvPicPr>
+          <p:nvPr/>
+        </p:nvPicPr>
+        <p:blipFill>
+          <a:blip r:embed="rId2"/>
+          <a:stretch>
+            <a:fillRect/>
+          </a:stretch>
+        </p:blipFill>
+        <p:spPr>
+          <a:xfrm>
+            <a:off x="987552" y="1819656"/>
+            <a:ext cx="365760" cy="365760"/>
+          </a:xfrm>
+          <a:prstGeom prst="rect">
+            <a:avLst/>
+          </a:prstGeom>
+        </p:spPr>
+      </p:pic>
+      <p:sp>
+        <p:nvSpPr>
+          <p:cNvPr id="8" name="TextBox 7"/>
           <p:cNvSpPr txBox="1"/>
           <p:nvPr/>
         </p:nvSpPr>
         <p:spPr>
           <a:xfrm>
-            <a:off x="868680" y="1783080"/>
-            <a:ext cx="2240280" cy="3017520"/>
+            <a:off x="932688" y="2331720"/>
+            <a:ext cx="2112264" cy="2423160"/>
           </a:xfrm>
           <a:prstGeom prst="rect">
             <a:avLst/>
@@ -8110,16 +10187,16 @@
           <a:noFill/>
         </p:spPr>
         <p:txBody>
-          <a:bodyPr wrap="square">
+          <a:bodyPr wrap="square" lIns="0" tIns="0" rIns="0" bIns="0">
             <a:spAutoFit/>
           </a:bodyPr>
           <a:lstStyle/>
           <a:p>
             <a:pPr>
               <a:spcAft>
-                <a:spcPts val="600"/>
+                <a:spcPts val="300"/>
               </a:spcAft>
-              <a:defRPr sz="1500" b="1">
+              <a:defRPr sz="1450" b="1">
                 <a:solidFill>
                   <a:srgbClr val="F8FAFC"/>
                 </a:solidFill>
@@ -8132,7 +10209,7 @@
           <a:p>
             <a:pPr>
               <a:spcAft>
-                <a:spcPts val="600"/>
+                <a:spcPts val="400"/>
               </a:spcAft>
               <a:defRPr sz="950" b="1">
                 <a:solidFill>
@@ -8146,7 +10223,7 @@
           </a:p>
           <a:p>
             <a:pPr>
-              <a:defRPr sz="1150">
+              <a:defRPr sz="1100">
                 <a:solidFill>
                   <a:srgbClr val="94A3B8"/>
                 </a:solidFill>
@@ -8160,13 +10237,13 @@
       </p:sp>
       <p:sp>
         <p:nvSpPr>
-          <p:cNvPr id="7" name="Rounded Rectangle 6"/>
+          <p:cNvPr id="9" name="Rounded Rectangle 8"/>
           <p:cNvSpPr/>
           <p:nvPr/>
         </p:nvSpPr>
         <p:spPr>
           <a:xfrm>
-            <a:off x="3456432" y="1645920"/>
+            <a:off x="3456432" y="1600200"/>
             <a:ext cx="2514600" cy="3291840"/>
           </a:xfrm>
           <a:prstGeom prst="roundRect">
@@ -8205,14 +10282,81 @@
       </p:sp>
       <p:sp>
         <p:nvSpPr>
-          <p:cNvPr id="8" name="TextBox 7"/>
+          <p:cNvPr id="10" name="Rounded Rectangle 9"/>
+          <p:cNvSpPr/>
+          <p:nvPr/>
+        </p:nvSpPr>
+        <p:spPr>
+          <a:xfrm>
+            <a:off x="3657600" y="1764792"/>
+            <a:ext cx="475488" cy="475488"/>
+          </a:xfrm>
+          <a:prstGeom prst="roundRect">
+            <a:avLst/>
+          </a:prstGeom>
+          <a:solidFill>
+            <a:srgbClr val="103040"/>
+          </a:solidFill>
+          <a:ln>
+            <a:noFill/>
+          </a:ln>
+        </p:spPr>
+        <p:style>
+          <a:lnRef idx="1">
+            <a:schemeClr val="accent1"/>
+          </a:lnRef>
+          <a:fillRef idx="3">
+            <a:schemeClr val="accent1"/>
+          </a:fillRef>
+          <a:effectRef idx="2">
+            <a:schemeClr val="accent1"/>
+          </a:effectRef>
+          <a:fontRef idx="minor">
+            <a:schemeClr val="lt1"/>
+          </a:fontRef>
+        </p:style>
+        <p:txBody>
+          <a:bodyPr rtlCol="0" anchor="ctr"/>
+          <a:lstStyle/>
+          <a:p>
+            <a:pPr algn="ctr"/>
+          </a:p>
+        </p:txBody>
+      </p:sp>
+      <p:pic>
+        <p:nvPicPr>
+          <p:cNvPr id="11" name="Picture 10" descr="users_cyan.png"/>
+          <p:cNvPicPr>
+            <a:picLocks noChangeAspect="1"/>
+          </p:cNvPicPr>
+          <p:nvPr/>
+        </p:nvPicPr>
+        <p:blipFill>
+          <a:blip r:embed="rId3"/>
+          <a:stretch>
+            <a:fillRect/>
+          </a:stretch>
+        </p:blipFill>
+        <p:spPr>
+          <a:xfrm>
+            <a:off x="3712464" y="1819656"/>
+            <a:ext cx="365760" cy="365760"/>
+          </a:xfrm>
+          <a:prstGeom prst="rect">
+            <a:avLst/>
+          </a:prstGeom>
+        </p:spPr>
+      </p:pic>
+      <p:sp>
+        <p:nvSpPr>
+          <p:cNvPr id="12" name="TextBox 11"/>
           <p:cNvSpPr txBox="1"/>
           <p:nvPr/>
         </p:nvSpPr>
         <p:spPr>
           <a:xfrm>
-            <a:off x="3593592" y="1783080"/>
-            <a:ext cx="2240280" cy="3017520"/>
+            <a:off x="3657600" y="2331720"/>
+            <a:ext cx="2112264" cy="2423160"/>
           </a:xfrm>
           <a:prstGeom prst="rect">
             <a:avLst/>
@@ -8220,16 +10364,16 @@
           <a:noFill/>
         </p:spPr>
         <p:txBody>
-          <a:bodyPr wrap="square">
+          <a:bodyPr wrap="square" lIns="0" tIns="0" rIns="0" bIns="0">
             <a:spAutoFit/>
           </a:bodyPr>
           <a:lstStyle/>
           <a:p>
             <a:pPr>
               <a:spcAft>
-                <a:spcPts val="600"/>
+                <a:spcPts val="300"/>
               </a:spcAft>
-              <a:defRPr sz="1500" b="1">
+              <a:defRPr sz="1450" b="1">
                 <a:solidFill>
                   <a:srgbClr val="F8FAFC"/>
                 </a:solidFill>
@@ -8242,7 +10386,7 @@
           <a:p>
             <a:pPr>
               <a:spcAft>
-                <a:spcPts val="600"/>
+                <a:spcPts val="400"/>
               </a:spcAft>
               <a:defRPr sz="950" b="1">
                 <a:solidFill>
@@ -8256,7 +10400,7 @@
           </a:p>
           <a:p>
             <a:pPr>
-              <a:defRPr sz="1150">
+              <a:defRPr sz="1100">
                 <a:solidFill>
                   <a:srgbClr val="94A3B8"/>
                 </a:solidFill>
@@ -8270,13 +10414,13 @@
       </p:sp>
       <p:sp>
         <p:nvSpPr>
-          <p:cNvPr id="9" name="Rounded Rectangle 8"/>
+          <p:cNvPr id="13" name="Rounded Rectangle 12"/>
           <p:cNvSpPr/>
           <p:nvPr/>
         </p:nvSpPr>
         <p:spPr>
           <a:xfrm>
-            <a:off x="6181344" y="1645920"/>
+            <a:off x="6181344" y="1600200"/>
             <a:ext cx="2514600" cy="3291840"/>
           </a:xfrm>
           <a:prstGeom prst="roundRect">
@@ -8315,14 +10459,81 @@
       </p:sp>
       <p:sp>
         <p:nvSpPr>
-          <p:cNvPr id="10" name="TextBox 9"/>
+          <p:cNvPr id="14" name="Rounded Rectangle 13"/>
+          <p:cNvSpPr/>
+          <p:nvPr/>
+        </p:nvSpPr>
+        <p:spPr>
+          <a:xfrm>
+            <a:off x="6382512" y="1764792"/>
+            <a:ext cx="475488" cy="475488"/>
+          </a:xfrm>
+          <a:prstGeom prst="roundRect">
+            <a:avLst/>
+          </a:prstGeom>
+          <a:solidFill>
+            <a:srgbClr val="3A1C20"/>
+          </a:solidFill>
+          <a:ln>
+            <a:noFill/>
+          </a:ln>
+        </p:spPr>
+        <p:style>
+          <a:lnRef idx="1">
+            <a:schemeClr val="accent1"/>
+          </a:lnRef>
+          <a:fillRef idx="3">
+            <a:schemeClr val="accent1"/>
+          </a:fillRef>
+          <a:effectRef idx="2">
+            <a:schemeClr val="accent1"/>
+          </a:effectRef>
+          <a:fontRef idx="minor">
+            <a:schemeClr val="lt1"/>
+          </a:fontRef>
+        </p:style>
+        <p:txBody>
+          <a:bodyPr rtlCol="0" anchor="ctr"/>
+          <a:lstStyle/>
+          <a:p>
+            <a:pPr algn="ctr"/>
+          </a:p>
+        </p:txBody>
+      </p:sp>
+      <p:pic>
+        <p:nvPicPr>
+          <p:cNvPr id="15" name="Picture 14" descr="zap_coral.png"/>
+          <p:cNvPicPr>
+            <a:picLocks noChangeAspect="1"/>
+          </p:cNvPicPr>
+          <p:nvPr/>
+        </p:nvPicPr>
+        <p:blipFill>
+          <a:blip r:embed="rId4"/>
+          <a:stretch>
+            <a:fillRect/>
+          </a:stretch>
+        </p:blipFill>
+        <p:spPr>
+          <a:xfrm>
+            <a:off x="6437376" y="1819656"/>
+            <a:ext cx="365760" cy="365760"/>
+          </a:xfrm>
+          <a:prstGeom prst="rect">
+            <a:avLst/>
+          </a:prstGeom>
+        </p:spPr>
+      </p:pic>
+      <p:sp>
+        <p:nvSpPr>
+          <p:cNvPr id="16" name="TextBox 15"/>
           <p:cNvSpPr txBox="1"/>
           <p:nvPr/>
         </p:nvSpPr>
         <p:spPr>
           <a:xfrm>
-            <a:off x="6318504" y="1783080"/>
-            <a:ext cx="2240280" cy="3017520"/>
+            <a:off x="6382512" y="2331720"/>
+            <a:ext cx="2112264" cy="2423160"/>
           </a:xfrm>
           <a:prstGeom prst="rect">
             <a:avLst/>
@@ -8330,16 +10541,16 @@
           <a:noFill/>
         </p:spPr>
         <p:txBody>
-          <a:bodyPr wrap="square">
+          <a:bodyPr wrap="square" lIns="0" tIns="0" rIns="0" bIns="0">
             <a:spAutoFit/>
           </a:bodyPr>
           <a:lstStyle/>
           <a:p>
             <a:pPr>
               <a:spcAft>
-                <a:spcPts val="600"/>
+                <a:spcPts val="300"/>
               </a:spcAft>
-              <a:defRPr sz="1500" b="1">
+              <a:defRPr sz="1450" b="1">
                 <a:solidFill>
                   <a:srgbClr val="F8FAFC"/>
                 </a:solidFill>
@@ -8352,7 +10563,7 @@
           <a:p>
             <a:pPr>
               <a:spcAft>
-                <a:spcPts val="600"/>
+                <a:spcPts val="400"/>
               </a:spcAft>
               <a:defRPr sz="950" b="1">
                 <a:solidFill>
@@ -8366,7 +10577,7 @@
           </a:p>
           <a:p>
             <a:pPr>
-              <a:defRPr sz="1150">
+              <a:defRPr sz="1100">
                 <a:solidFill>
                   <a:srgbClr val="94A3B8"/>
                 </a:solidFill>
@@ -8380,13 +10591,13 @@
       </p:sp>
       <p:sp>
         <p:nvSpPr>
-          <p:cNvPr id="11" name="Rounded Rectangle 10"/>
+          <p:cNvPr id="17" name="Rounded Rectangle 16"/>
           <p:cNvSpPr/>
           <p:nvPr/>
         </p:nvSpPr>
         <p:spPr>
           <a:xfrm>
-            <a:off x="8906256" y="1645920"/>
+            <a:off x="8906256" y="1600200"/>
             <a:ext cx="2514600" cy="3291840"/>
           </a:xfrm>
           <a:prstGeom prst="roundRect">
@@ -8425,14 +10636,81 @@
       </p:sp>
       <p:sp>
         <p:nvSpPr>
-          <p:cNvPr id="12" name="TextBox 11"/>
+          <p:cNvPr id="18" name="Rounded Rectangle 17"/>
+          <p:cNvSpPr/>
+          <p:nvPr/>
+        </p:nvSpPr>
+        <p:spPr>
+          <a:xfrm>
+            <a:off x="9107424" y="1764792"/>
+            <a:ext cx="475488" cy="475488"/>
+          </a:xfrm>
+          <a:prstGeom prst="roundRect">
+            <a:avLst/>
+          </a:prstGeom>
+          <a:solidFill>
+            <a:srgbClr val="103040"/>
+          </a:solidFill>
+          <a:ln>
+            <a:noFill/>
+          </a:ln>
+        </p:spPr>
+        <p:style>
+          <a:lnRef idx="1">
+            <a:schemeClr val="accent1"/>
+          </a:lnRef>
+          <a:fillRef idx="3">
+            <a:schemeClr val="accent1"/>
+          </a:fillRef>
+          <a:effectRef idx="2">
+            <a:schemeClr val="accent1"/>
+          </a:effectRef>
+          <a:fontRef idx="minor">
+            <a:schemeClr val="lt1"/>
+          </a:fontRef>
+        </p:style>
+        <p:txBody>
+          <a:bodyPr rtlCol="0" anchor="ctr"/>
+          <a:lstStyle/>
+          <a:p>
+            <a:pPr algn="ctr"/>
+          </a:p>
+        </p:txBody>
+      </p:sp>
+      <p:pic>
+        <p:nvPicPr>
+          <p:cNvPr id="19" name="Picture 18" descr="moon_cyan.png"/>
+          <p:cNvPicPr>
+            <a:picLocks noChangeAspect="1"/>
+          </p:cNvPicPr>
+          <p:nvPr/>
+        </p:nvPicPr>
+        <p:blipFill>
+          <a:blip r:embed="rId5"/>
+          <a:stretch>
+            <a:fillRect/>
+          </a:stretch>
+        </p:blipFill>
+        <p:spPr>
+          <a:xfrm>
+            <a:off x="9162288" y="1819656"/>
+            <a:ext cx="365760" cy="365760"/>
+          </a:xfrm>
+          <a:prstGeom prst="rect">
+            <a:avLst/>
+          </a:prstGeom>
+        </p:spPr>
+      </p:pic>
+      <p:sp>
+        <p:nvSpPr>
+          <p:cNvPr id="20" name="TextBox 19"/>
           <p:cNvSpPr txBox="1"/>
           <p:nvPr/>
         </p:nvSpPr>
         <p:spPr>
           <a:xfrm>
-            <a:off x="9043416" y="1783080"/>
-            <a:ext cx="2240280" cy="3017520"/>
+            <a:off x="9107424" y="2331720"/>
+            <a:ext cx="2112264" cy="2423160"/>
           </a:xfrm>
           <a:prstGeom prst="rect">
             <a:avLst/>
@@ -8440,16 +10718,16 @@
           <a:noFill/>
         </p:spPr>
         <p:txBody>
-          <a:bodyPr wrap="square">
+          <a:bodyPr wrap="square" lIns="0" tIns="0" rIns="0" bIns="0">
             <a:spAutoFit/>
           </a:bodyPr>
           <a:lstStyle/>
           <a:p>
             <a:pPr>
               <a:spcAft>
-                <a:spcPts val="600"/>
+                <a:spcPts val="300"/>
               </a:spcAft>
-              <a:defRPr sz="1500" b="1">
+              <a:defRPr sz="1450" b="1">
                 <a:solidFill>
                   <a:srgbClr val="F8FAFC"/>
                 </a:solidFill>
@@ -8462,7 +10740,7 @@
           <a:p>
             <a:pPr>
               <a:spcAft>
-                <a:spcPts val="600"/>
+                <a:spcPts val="400"/>
               </a:spcAft>
               <a:defRPr sz="950" b="1">
                 <a:solidFill>
@@ -8476,7 +10754,7 @@
           </a:p>
           <a:p>
             <a:pPr>
-              <a:defRPr sz="1150">
+              <a:defRPr sz="1100">
                 <a:solidFill>
                   <a:srgbClr val="94A3B8"/>
                 </a:solidFill>
@@ -8490,13 +10768,13 @@
       </p:sp>
       <p:sp>
         <p:nvSpPr>
-          <p:cNvPr id="13" name="Rounded Rectangle 12"/>
+          <p:cNvPr id="21" name="Rounded Rectangle 20"/>
           <p:cNvSpPr/>
           <p:nvPr/>
         </p:nvSpPr>
         <p:spPr>
           <a:xfrm>
-            <a:off x="731520" y="5212080"/>
+            <a:off x="731520" y="5166360"/>
             <a:ext cx="10698480" cy="1005840"/>
           </a:xfrm>
           <a:prstGeom prst="roundRect">
@@ -8535,13 +10813,13 @@
       </p:sp>
       <p:sp>
         <p:nvSpPr>
-          <p:cNvPr id="14" name="TextBox 13"/>
+          <p:cNvPr id="22" name="TextBox 21"/>
           <p:cNvSpPr txBox="1"/>
           <p:nvPr/>
         </p:nvSpPr>
         <p:spPr>
           <a:xfrm>
-            <a:off x="914400" y="5349240"/>
+            <a:off x="914400" y="5303520"/>
             <a:ext cx="10332720" cy="731520"/>
           </a:xfrm>
           <a:prstGeom prst="rect">
